--- a/slides/08.pptx
+++ b/slides/08.pptx
@@ -166,6 +166,118 @@
         <inkml:traceFormat>
           <inkml:channel name="X" type="integer" min="-2.14748E9" max="2.14748E9" units="cm"/>
           <inkml:channel name="Y" type="integer" min="-2.14748E9" max="2.14748E9" units="cm"/>
+        </inkml:traceFormat>
+        <inkml:channelProperties>
+          <inkml:channelProperty channel="X" name="resolution" value="1000" units="1/cm"/>
+          <inkml:channelProperty channel="Y" name="resolution" value="1000" units="1/cm"/>
+        </inkml:channelProperties>
+      </inkml:inkSource>
+      <inkml:timestamp xml:id="ts0" timeString="2026-05-19T07:43:12.836"/>
+    </inkml:context>
+    <inkml:brush xml:id="br0">
+      <inkml:brushProperty name="width" value="0.4" units="cm"/>
+      <inkml:brushProperty name="height" value="0.8" units="cm"/>
+      <inkml:brushProperty name="color" value="#FFACD5"/>
+      <inkml:brushProperty name="tip" value="rectangle"/>
+      <inkml:brushProperty name="rasterOp" value="maskPen"/>
+    </inkml:brush>
+  </inkml:definitions>
+  <inkml:trace contextRef="#ctx0" brushRef="#br0">1 1,'56'1,"0"0,38 1,-39-2,-22 0,-13 0,-2 1,6-1,5 2,9-2,-10 0,-8 0,1 0,-3 2,13-1,-1 2,0-2,-15 0,-5-1</inkml:trace>
+</inkml:ink>
+</file>
+
+<file path=ppt/ink/ink10.xml><?xml version="1.0" encoding="utf-8"?>
+<inkml:ink xmlns:inkml="http://www.w3.org/2003/InkML">
+  <inkml:definitions>
+    <inkml:context xml:id="ctx0">
+      <inkml:inkSource xml:id="inkSrc0">
+        <inkml:traceFormat>
+          <inkml:channel name="X" type="integer" min="-2.14748E9" max="2.14748E9" units="cm"/>
+          <inkml:channel name="Y" type="integer" min="-2.14748E9" max="2.14748E9" units="cm"/>
+        </inkml:traceFormat>
+        <inkml:channelProperties>
+          <inkml:channelProperty channel="X" name="resolution" value="1000" units="1/cm"/>
+          <inkml:channelProperty channel="Y" name="resolution" value="1000" units="1/cm"/>
+        </inkml:channelProperties>
+      </inkml:inkSource>
+      <inkml:timestamp xml:id="ts0" timeString="2026-05-19T07:52:59.042"/>
+    </inkml:context>
+    <inkml:brush xml:id="br0">
+      <inkml:brushProperty name="width" value="0.4" units="cm"/>
+      <inkml:brushProperty name="height" value="0.8" units="cm"/>
+      <inkml:brushProperty name="color" value="#FFACD5"/>
+      <inkml:brushProperty name="tip" value="rectangle"/>
+      <inkml:brushProperty name="rasterOp" value="maskPen"/>
+    </inkml:brush>
+  </inkml:definitions>
+  <inkml:trace contextRef="#ctx0" brushRef="#br0">1 0,'96'7,"-20"-1,-53-5,-1 1,-4-1,8-1,-2 2,5 0,5 1,-1 0,7 2,-11-4,-7 2,-9-3</inkml:trace>
+</inkml:ink>
+</file>
+
+<file path=ppt/ink/ink11.xml><?xml version="1.0" encoding="utf-8"?>
+<inkml:ink xmlns:inkml="http://www.w3.org/2003/InkML">
+  <inkml:definitions>
+    <inkml:context xml:id="ctx0">
+      <inkml:inkSource xml:id="inkSrc0">
+        <inkml:traceFormat>
+          <inkml:channel name="X" type="integer" min="-2.14748E9" max="2.14748E9" units="cm"/>
+          <inkml:channel name="Y" type="integer" min="-2.14748E9" max="2.14748E9" units="cm"/>
+        </inkml:traceFormat>
+        <inkml:channelProperties>
+          <inkml:channelProperty channel="X" name="resolution" value="1000" units="1/cm"/>
+          <inkml:channelProperty channel="Y" name="resolution" value="1000" units="1/cm"/>
+        </inkml:channelProperties>
+      </inkml:inkSource>
+      <inkml:timestamp xml:id="ts0" timeString="2026-05-19T07:53:16.702"/>
+    </inkml:context>
+    <inkml:brush xml:id="br0">
+      <inkml:brushProperty name="width" value="0.4" units="cm"/>
+      <inkml:brushProperty name="height" value="0.8" units="cm"/>
+      <inkml:brushProperty name="color" value="#00FDFF"/>
+      <inkml:brushProperty name="tip" value="rectangle"/>
+      <inkml:brushProperty name="rasterOp" value="maskPen"/>
+    </inkml:brush>
+  </inkml:definitions>
+  <inkml:trace contextRef="#ctx0" brushRef="#br0">0 5,'67'5,"-11"-1,-33-3,-3-1,-2 1,4 0,3 0,-2 0,1-1,-3 0,-3 0,8 0,-7 0,11 0,-3 0,-4 0,2 0,-6-1,1 0,3-1,-3 1,1 0,2-1,-4 1,9-3,-13 3,12-1,-11 1,6 1,5-2,-13 3,18 2,2-2,4 2,8-3,-18 0,-6 0,-7 0</inkml:trace>
+</inkml:ink>
+</file>
+
+<file path=ppt/ink/ink12.xml><?xml version="1.0" encoding="utf-8"?>
+<inkml:ink xmlns:inkml="http://www.w3.org/2003/InkML">
+  <inkml:definitions>
+    <inkml:context xml:id="ctx0">
+      <inkml:inkSource xml:id="inkSrc0">
+        <inkml:traceFormat>
+          <inkml:channel name="X" type="integer" min="-2.14748E9" max="2.14748E9" units="cm"/>
+          <inkml:channel name="Y" type="integer" min="-2.14748E9" max="2.14748E9" units="cm"/>
+        </inkml:traceFormat>
+        <inkml:channelProperties>
+          <inkml:channelProperty channel="X" name="resolution" value="1000" units="1/cm"/>
+          <inkml:channelProperty channel="Y" name="resolution" value="1000" units="1/cm"/>
+        </inkml:channelProperties>
+      </inkml:inkSource>
+      <inkml:timestamp xml:id="ts0" timeString="2026-05-19T07:53:23.294"/>
+    </inkml:context>
+    <inkml:brush xml:id="br0">
+      <inkml:brushProperty name="width" value="0.4" units="cm"/>
+      <inkml:brushProperty name="height" value="0.8" units="cm"/>
+      <inkml:brushProperty name="color" value="#00FDFF"/>
+      <inkml:brushProperty name="tip" value="rectangle"/>
+      <inkml:brushProperty name="rasterOp" value="maskPen"/>
+    </inkml:brush>
+  </inkml:definitions>
+  <inkml:trace contextRef="#ctx0" brushRef="#br0">0 1,'58'4,"-1"1,4 1,-3-1,27 6,-10-2,-18-1,-23-4,-4-1,-12 0,2-3,2 1,1 0,12 0,12 2,12 3,22 2,-3 1,0 2,-15-3,-8 1,-17-3,-11 0,-14-4</inkml:trace>
+</inkml:ink>
+</file>
+
+<file path=ppt/ink/ink13.xml><?xml version="1.0" encoding="utf-8"?>
+<inkml:ink xmlns:inkml="http://www.w3.org/2003/InkML">
+  <inkml:definitions>
+    <inkml:context xml:id="ctx0">
+      <inkml:inkSource xml:id="inkSrc0">
+        <inkml:traceFormat>
+          <inkml:channel name="X" type="integer" min="-2.14748E9" max="2.14748E9" units="cm"/>
+          <inkml:channel name="Y" type="integer" min="-2.14748E9" max="2.14748E9" units="cm"/>
           <inkml:channel name="F" type="integer" max="32767" units="dev"/>
         </inkml:traceFormat>
         <inkml:channelProperties>
@@ -185,7 +297,7 @@
 </inkml:ink>
 </file>
 
-<file path=ppt/ink/ink2.xml><?xml version="1.0" encoding="utf-8"?>
+<file path=ppt/ink/ink14.xml><?xml version="1.0" encoding="utf-8"?>
 <inkml:ink xmlns:inkml="http://www.w3.org/2003/InkML">
   <inkml:definitions>
     <inkml:context xml:id="ctx0">
@@ -209,6 +321,874 @@
     </inkml:brush>
   </inkml:definitions>
   <inkml:trace contextRef="#ctx0" brushRef="#br0">10 0 24575,'0'10'0,"0"4"0,0 7 0,0 6 0,0 5 0,0 8 0,0 6 0,0 0 0,0-3 0,0-11 0,0-10 0,0-5 0,0-4 0,-1 2 0,-1 2 0,0 2 0,-1 0 0,2-2 0,1-3 0,0-3 0,0-6 0,1-3 0,3-3 0,2-4 0,7-1 0,12-2 0,17-3 0,16 1 0,8-1 0,-1-1 0,-14 4 0,-13 2 0,-14 4 0,-7 2 0,-2 0 0,0 0 0,2 0 0,1 0 0,-1 0 0,-3 0 0,-3 0 0,-3-1 0,-7-1 0,-5-2 0,-3-1 0,-4-5 0,-3-7 0,-7-4 0,-4-5 0,-4 0 0,1 2 0,2 2 0,0 0 0,1 1 0,0 0 0,1 3 0,2 2 0,3 3 0,-1 1 0,0 1 0,1 1 0,0 2 0,3 0 0,4 3 0,2 1 0,3 1 0,0 1 0,0 0 0,-3-1 0,-1 0 0,-2-1 0,0 0 0,4 2 0,4-1 0,2 3 0,1-1 0</inkml:trace>
+</inkml:ink>
+</file>
+
+<file path=ppt/ink/ink15.xml><?xml version="1.0" encoding="utf-8"?>
+<inkml:ink xmlns:inkml="http://www.w3.org/2003/InkML">
+  <inkml:definitions>
+    <inkml:context xml:id="ctx0">
+      <inkml:inkSource xml:id="inkSrc0">
+        <inkml:traceFormat>
+          <inkml:channel name="X" type="integer" min="-2.14748E9" max="2.14748E9" units="cm"/>
+          <inkml:channel name="Y" type="integer" min="-2.14748E9" max="2.14748E9" units="cm"/>
+        </inkml:traceFormat>
+        <inkml:channelProperties>
+          <inkml:channelProperty channel="X" name="resolution" value="1000" units="1/cm"/>
+          <inkml:channelProperty channel="Y" name="resolution" value="1000" units="1/cm"/>
+        </inkml:channelProperties>
+      </inkml:inkSource>
+      <inkml:timestamp xml:id="ts0" timeString="2026-05-19T07:55:21.086"/>
+    </inkml:context>
+    <inkml:brush xml:id="br0">
+      <inkml:brushProperty name="width" value="0.4" units="cm"/>
+      <inkml:brushProperty name="height" value="0.8" units="cm"/>
+      <inkml:brushProperty name="color" value="#00FDFF"/>
+      <inkml:brushProperty name="tip" value="rectangle"/>
+      <inkml:brushProperty name="rasterOp" value="maskPen"/>
+    </inkml:brush>
+  </inkml:definitions>
+  <inkml:trace contextRef="#ctx0" brushRef="#br0">1 7,'51'0,"0"0,6 0,1 0,1 0,0 0,8 0,1 0,-3 0,-3 0,-9 0,-2-1,35 1,-18-1,3 1,0 0,-9 0,6-1,-13 0,0 0,-11 0,-6 1,-10 0,-6 0,-1 0,-1 0,5 0,8 0,-2 1,5 0,-3 1,-5-2,-8 0,4 2,0-2,17 3,-1-1,9 0,-8 1,-7-1,-4 0,2 1,9-2,19 1,9-1,3 1,7 0,-6-1,13 0,2 0,-10-1,13 0,-31 0,8 0,-21 0,-9 0,-9 0,-11 0,4 0,-6 0,11 0,-7 0,2 0,31 0,4 0,-5 0,-15 0</inkml:trace>
+</inkml:ink>
+</file>
+
+<file path=ppt/ink/ink16.xml><?xml version="1.0" encoding="utf-8"?>
+<inkml:ink xmlns:inkml="http://www.w3.org/2003/InkML">
+  <inkml:definitions>
+    <inkml:context xml:id="ctx0">
+      <inkml:inkSource xml:id="inkSrc0">
+        <inkml:traceFormat>
+          <inkml:channel name="X" type="integer" min="-2.14748E9" max="2.14748E9" units="cm"/>
+          <inkml:channel name="Y" type="integer" min="-2.14748E9" max="2.14748E9" units="cm"/>
+        </inkml:traceFormat>
+        <inkml:channelProperties>
+          <inkml:channelProperty channel="X" name="resolution" value="1000" units="1/cm"/>
+          <inkml:channelProperty channel="Y" name="resolution" value="1000" units="1/cm"/>
+        </inkml:channelProperties>
+      </inkml:inkSource>
+      <inkml:timestamp xml:id="ts0" timeString="2026-05-19T07:57:39.215"/>
+    </inkml:context>
+    <inkml:brush xml:id="br0">
+      <inkml:brushProperty name="width" value="0.4" units="cm"/>
+      <inkml:brushProperty name="height" value="0.8" units="cm"/>
+      <inkml:brushProperty name="color" value="#00FDFF"/>
+      <inkml:brushProperty name="tip" value="rectangle"/>
+      <inkml:brushProperty name="rasterOp" value="maskPen"/>
+    </inkml:brush>
+  </inkml:definitions>
+  <inkml:trace contextRef="#ctx0" brushRef="#br0">1 1,'76'4,"-1"0,16 1,3 0,-23 0,2-1,0 1,1-1,0 0,2 0,5 1,2 1,-1-1,-5 0,-1-1,3 0,12 1,2 0,1-1,1 0,1 0,-2-1,-4-1,-1 0,-1-1,-1 1,-1-1,-3 0,14-1,-4 0,4 0,-4 0,-20 0,-2 0,0-1,-1 0,-16 0,-2 1,0-1,-1 0,39 3,-41-2,4 1,14 0,2-1,4 1,1-2,9 1,-1 1,-14-1,-2 1,-2 1,-1 0,-3 0,-1 0,11-1,0 0,3 1,-2-2,-3 0,-2 0,-9-1,-4 1,23-1,-10-2,-13 2,-2-2,4 1,-12-2,5 0,-15 1,-1-1,-11 3,0 0,2 1,-1 0,7 0,5 0,4 0,6 0,-3 0,-18 0,-6 0</inkml:trace>
+</inkml:ink>
+</file>
+
+<file path=ppt/ink/ink17.xml><?xml version="1.0" encoding="utf-8"?>
+<inkml:ink xmlns:inkml="http://www.w3.org/2003/InkML">
+  <inkml:definitions>
+    <inkml:context xml:id="ctx0">
+      <inkml:inkSource xml:id="inkSrc0">
+        <inkml:traceFormat>
+          <inkml:channel name="X" type="integer" min="-2.14748E9" max="2.14748E9" units="cm"/>
+          <inkml:channel name="Y" type="integer" min="-2.14748E9" max="2.14748E9" units="cm"/>
+        </inkml:traceFormat>
+        <inkml:channelProperties>
+          <inkml:channelProperty channel="X" name="resolution" value="1000" units="1/cm"/>
+          <inkml:channelProperty channel="Y" name="resolution" value="1000" units="1/cm"/>
+        </inkml:channelProperties>
+      </inkml:inkSource>
+      <inkml:timestamp xml:id="ts0" timeString="2026-05-19T08:01:28.057"/>
+    </inkml:context>
+    <inkml:brush xml:id="br0">
+      <inkml:brushProperty name="width" value="0.4" units="cm"/>
+      <inkml:brushProperty name="height" value="0.8" units="cm"/>
+      <inkml:brushProperty name="color" value="#00FDFF"/>
+      <inkml:brushProperty name="tip" value="rectangle"/>
+      <inkml:brushProperty name="rasterOp" value="maskPen"/>
+    </inkml:brush>
+  </inkml:definitions>
+  <inkml:trace contextRef="#ctx0" brushRef="#br0">1 0,'0'0</inkml:trace>
+</inkml:ink>
+</file>
+
+<file path=ppt/ink/ink18.xml><?xml version="1.0" encoding="utf-8"?>
+<inkml:ink xmlns:inkml="http://www.w3.org/2003/InkML">
+  <inkml:definitions>
+    <inkml:context xml:id="ctx0">
+      <inkml:inkSource xml:id="inkSrc0">
+        <inkml:traceFormat>
+          <inkml:channel name="X" type="integer" min="-2.14748E9" max="2.14748E9" units="cm"/>
+          <inkml:channel name="Y" type="integer" min="-2.14748E9" max="2.14748E9" units="cm"/>
+        </inkml:traceFormat>
+        <inkml:channelProperties>
+          <inkml:channelProperty channel="X" name="resolution" value="1000" units="1/cm"/>
+          <inkml:channelProperty channel="Y" name="resolution" value="1000" units="1/cm"/>
+        </inkml:channelProperties>
+      </inkml:inkSource>
+      <inkml:timestamp xml:id="ts0" timeString="2026-05-19T08:01:49.397"/>
+    </inkml:context>
+    <inkml:brush xml:id="br0">
+      <inkml:brushProperty name="width" value="0.4" units="cm"/>
+      <inkml:brushProperty name="height" value="0.8" units="cm"/>
+      <inkml:brushProperty name="color" value="#00FDFF"/>
+      <inkml:brushProperty name="tip" value="rectangle"/>
+      <inkml:brushProperty name="rasterOp" value="maskPen"/>
+    </inkml:brush>
+  </inkml:definitions>
+  <inkml:trace contextRef="#ctx0" brushRef="#br0">0 44,'89'-4,"-1"0,-4 1,0 1,-6 3,3 1,13 0,5 1,-27-1,3 0,2 0,12 0,3 0,-2 0,-7-1,-1-1,2 1,9 0,2 0,-4-1,-14 1,-4-1,2-1,8 1,0 0,0-1,-6 1,-1 0,-1-1,-7 0,-1-1,0 1,1-1,0 1,-3 0,14-1,-2 1,-6 0,-3 0,-13 1,-2 0,41-3,0-2,1 0,-38 2,0 1,-4 1,1 0,11 1,2 0,5 1,3 0,20 0,4-1,-25 1,0 0,1 0,-4 0,-1 0,1-1,3 1,0 0,-4-1,13 1,-5-1,-1 0,-5 0,-14 0,-4 0,38-1,-2 0,-18-4,-6 2,-23 0,-11 1,-5 2,-2-3,1 2,-2 0,0 0,-2 0,3 0,6-1,2 1,7-2,-9 2,-5 0,-8 1,13 0,8 0,-5 0,-7 0,-26 0</inkml:trace>
+</inkml:ink>
+</file>
+
+<file path=ppt/ink/ink19.xml><?xml version="1.0" encoding="utf-8"?>
+<inkml:ink xmlns:inkml="http://www.w3.org/2003/InkML">
+  <inkml:definitions>
+    <inkml:context xml:id="ctx0">
+      <inkml:inkSource xml:id="inkSrc0">
+        <inkml:traceFormat>
+          <inkml:channel name="X" type="integer" min="-2.14748E9" max="2.14748E9" units="cm"/>
+          <inkml:channel name="Y" type="integer" min="-2.14748E9" max="2.14748E9" units="cm"/>
+        </inkml:traceFormat>
+        <inkml:channelProperties>
+          <inkml:channelProperty channel="X" name="resolution" value="1000" units="1/cm"/>
+          <inkml:channelProperty channel="Y" name="resolution" value="1000" units="1/cm"/>
+        </inkml:channelProperties>
+      </inkml:inkSource>
+      <inkml:timestamp xml:id="ts0" timeString="2026-05-19T08:02:01.076"/>
+    </inkml:context>
+    <inkml:brush xml:id="br0">
+      <inkml:brushProperty name="width" value="0.4" units="cm"/>
+      <inkml:brushProperty name="height" value="0.8" units="cm"/>
+      <inkml:brushProperty name="color" value="#00FDFF"/>
+      <inkml:brushProperty name="tip" value="rectangle"/>
+      <inkml:brushProperty name="rasterOp" value="maskPen"/>
+    </inkml:brush>
+  </inkml:definitions>
+  <inkml:trace contextRef="#ctx0" brushRef="#br0">1 0,'77'3,"0"0,-6 0,0 0,8 4,-2 0,-10-2,-3 0,-5 0,-1 0,39 1,-28-1,0-2,-11-1,11 2,-6-2,5 1,1-2,0 0,4-1,-6 1,2 0,-5 1,5-2,-9 2,7-2,1 2,13-2,8 0,3 0,-40 1,0 0,44 1,-45 0,-1-1,41 0,-13 0,-4 0,-5 1,-3 0,1 1,-6-2,-2 1,0-2,-4 1,-9 0,-11 0,-12-1,7 0,2 0,7 0,13 0,9 3,26 0,-30-1,3 0,2 0,2-1,10 0,-1-1,-12 0,-3 0,-3-1,-3 0,23 1,-5-2,-17 2,2 0,-12-1,-8 1,17-4,6 4,28-3,-1 2,-26 0,1 1,38-1,-38 0,0 1,33-1,-10 0,-4 0,-6-1,-2 0,0-1,-8 2,17-1,11 0,-39 1,-1 0,39-1,-26 2,-26 0,-17 0,5-2,4 1,17 0,2 0,-4 0,-15 0,-13 0,-9 1</inkml:trace>
+</inkml:ink>
+</file>
+
+<file path=ppt/ink/ink2.xml><?xml version="1.0" encoding="utf-8"?>
+<inkml:ink xmlns:inkml="http://www.w3.org/2003/InkML">
+  <inkml:definitions>
+    <inkml:context xml:id="ctx0">
+      <inkml:inkSource xml:id="inkSrc0">
+        <inkml:traceFormat>
+          <inkml:channel name="X" type="integer" min="-2.14748E9" max="2.14748E9" units="cm"/>
+          <inkml:channel name="Y" type="integer" min="-2.14748E9" max="2.14748E9" units="cm"/>
+        </inkml:traceFormat>
+        <inkml:channelProperties>
+          <inkml:channelProperty channel="X" name="resolution" value="1000" units="1/cm"/>
+          <inkml:channelProperty channel="Y" name="resolution" value="1000" units="1/cm"/>
+        </inkml:channelProperties>
+      </inkml:inkSource>
+      <inkml:timestamp xml:id="ts0" timeString="2026-05-19T07:47:18.081"/>
+    </inkml:context>
+    <inkml:brush xml:id="br0">
+      <inkml:brushProperty name="width" value="0.4" units="cm"/>
+      <inkml:brushProperty name="height" value="0.8" units="cm"/>
+      <inkml:brushProperty name="color" value="#FFACD5"/>
+      <inkml:brushProperty name="tip" value="rectangle"/>
+      <inkml:brushProperty name="rasterOp" value="maskPen"/>
+    </inkml:brush>
+  </inkml:definitions>
+  <inkml:trace contextRef="#ctx0" brushRef="#br0">1 32,'60'-5,"-1"0,9 0,0 1,-4 1,-1 0,-2 0,0 0,-6 2,-2 1,30 1,4-1,0 3,-38-2,2 0,9 1,3 1,3-1,3 0,6 1,1 0,-1 0,0-1,-10 0,-1 0,-5 0,-2-1,31 1,-14-2,-10 0,-5 0,4 0,11 2,5 0,12 0,-1 0,-34-2,1 0,4 0,1 0,6 0,1 0,2 0,-1 0,-7 1,-3 0,-6-1,-2 0,43 3,-15-2,3 2,-6-1,1 2,20 0,-47-2,3 0,15 0,2 0,1-1,0 1,-2-1,0 0,6 1,-3-1,-19 1,-4-1,45 1,-36-1,-12 0,3 0,7 0,3-1,6 0,2 0,11 0,21 0,-43-1,1-1,6 1,1 0,3-2,0 0,-6 2,-2-1,-4 1,-2-1,24 1,-13 1,-18 0,-3-1,-3 0,-3 0,8 1,5-1,10 0,20-1,-6-1,0 3,-26-2,-10 2,-5-1,5 0,-6 0,-10 1,16 0,-9 0,4 0,-13 0</inkml:trace>
+</inkml:ink>
+</file>
+
+<file path=ppt/ink/ink20.xml><?xml version="1.0" encoding="utf-8"?>
+<inkml:ink xmlns:inkml="http://www.w3.org/2003/InkML">
+  <inkml:definitions>
+    <inkml:context xml:id="ctx0">
+      <inkml:inkSource xml:id="inkSrc0">
+        <inkml:traceFormat>
+          <inkml:channel name="X" type="integer" min="-2.14748E9" max="2.14748E9" units="cm"/>
+          <inkml:channel name="Y" type="integer" min="-2.14748E9" max="2.14748E9" units="cm"/>
+        </inkml:traceFormat>
+        <inkml:channelProperties>
+          <inkml:channelProperty channel="X" name="resolution" value="1000" units="1/cm"/>
+          <inkml:channelProperty channel="Y" name="resolution" value="1000" units="1/cm"/>
+        </inkml:channelProperties>
+      </inkml:inkSource>
+      <inkml:timestamp xml:id="ts0" timeString="2026-05-19T08:02:06.586"/>
+    </inkml:context>
+    <inkml:brush xml:id="br0">
+      <inkml:brushProperty name="width" value="0.4" units="cm"/>
+      <inkml:brushProperty name="height" value="0.8" units="cm"/>
+      <inkml:brushProperty name="color" value="#00FDFF"/>
+      <inkml:brushProperty name="tip" value="rectangle"/>
+      <inkml:brushProperty name="rasterOp" value="maskPen"/>
+    </inkml:brush>
+  </inkml:definitions>
+  <inkml:trace contextRef="#ctx0" brushRef="#br0">1 41,'76'-5,"-1"1,1 0,9-1,1 1,1 1,-2 1,1 0,-1 0,-2 1,0 0,-1 1,-2 0,-2 2,-3-1,14 0,-4 1,3 1,-5 0,-20-2,-4 0,-7 0,-3-1,28 0,-22-1,-1 1,-6 0,-5 0,5 0,6-2,1 1,20-1,14 2,-35-1,4-1,12 1,3 0,6 0,0-1,-1 1,0 1,4 0,-2 0,-10 0,-2 0,-6 0,-3 0,30 0,-33 0,-13-1,2 0,11-2,10 2,2 0,8 1,-6 0,15 0,-15 0,10 2,-23-2,1 2,-24-2,-8 0,-14 0</inkml:trace>
+</inkml:ink>
+</file>
+
+<file path=ppt/ink/ink21.xml><?xml version="1.0" encoding="utf-8"?>
+<inkml:ink xmlns:inkml="http://www.w3.org/2003/InkML">
+  <inkml:definitions>
+    <inkml:context xml:id="ctx0">
+      <inkml:inkSource xml:id="inkSrc0">
+        <inkml:traceFormat>
+          <inkml:channel name="X" type="integer" min="-2.14748E9" max="2.14748E9" units="cm"/>
+          <inkml:channel name="Y" type="integer" min="-2.14748E9" max="2.14748E9" units="cm"/>
+        </inkml:traceFormat>
+        <inkml:channelProperties>
+          <inkml:channelProperty channel="X" name="resolution" value="1000" units="1/cm"/>
+          <inkml:channelProperty channel="Y" name="resolution" value="1000" units="1/cm"/>
+        </inkml:channelProperties>
+      </inkml:inkSource>
+      <inkml:timestamp xml:id="ts0" timeString="2026-05-19T08:02:34.597"/>
+    </inkml:context>
+    <inkml:brush xml:id="br0">
+      <inkml:brushProperty name="width" value="0.4" units="cm"/>
+      <inkml:brushProperty name="height" value="0.8" units="cm"/>
+      <inkml:brushProperty name="color" value="#00FDFF"/>
+      <inkml:brushProperty name="tip" value="rectangle"/>
+      <inkml:brushProperty name="rasterOp" value="maskPen"/>
+    </inkml:brush>
+  </inkml:definitions>
+  <inkml:trace contextRef="#ctx0" brushRef="#br0">0 30,'53'-5,"0"0,4 0,5 1,20 1,5 1,5 0,2 0,-26 1,0 1,-1-1,18 1,-2 0,0 0,-2 0,-16 1,0 0,5-1,1 1,-1 0,0 2,-6-2,0 0,10 0,2 1,1 2,2 0,4-3,2 1,0 2,1 0,-4-3,0-1,-5 1,0 0,-2 0,0 0,-9 0,-1-1,2 1,0 0,-4-1,0 0,6 1,1 0,0-1,1 1,-6 1,-1-1,6 1,-2 0,-15-1,-1 0,6 0,0 0,-7-1,-2 0,47 0,-40 1,1 0,-5-1,1 1,4 0,0-1,-6 0,0-1,47-1,-45 1,0-1,-3 2,1-1,11 1,0 0,35 0,-41 0,1 0,32 1,5 0,-12 1,1 2,-7-3,3 3,-3-3,-5 2,5-3,-4 1,1 1,-3 0,-10 0,15 1,3 0,15-1,-11 0,-4-4,-16 0,-5-1,-3-1,-5-1,-2-1,-2-1,3-2,-3 2,11-1,-7 4,8 0,-3 0,0 2,12-1,-3 1,4-1,-8 0,-11 0,5 2,4 0,3 1,-14 0,-15 0,-21 0,19 0,2 0,20 0,-7 0,-1 0,-4 2,-5-2,-10 2,-12-2</inkml:trace>
+</inkml:ink>
+</file>
+
+<file path=ppt/ink/ink22.xml><?xml version="1.0" encoding="utf-8"?>
+<inkml:ink xmlns:inkml="http://www.w3.org/2003/InkML">
+  <inkml:definitions>
+    <inkml:context xml:id="ctx0">
+      <inkml:inkSource xml:id="inkSrc0">
+        <inkml:traceFormat>
+          <inkml:channel name="X" type="integer" min="-2.14748E9" max="2.14748E9" units="cm"/>
+          <inkml:channel name="Y" type="integer" min="-2.14748E9" max="2.14748E9" units="cm"/>
+        </inkml:traceFormat>
+        <inkml:channelProperties>
+          <inkml:channelProperty channel="X" name="resolution" value="1000" units="1/cm"/>
+          <inkml:channelProperty channel="Y" name="resolution" value="1000" units="1/cm"/>
+        </inkml:channelProperties>
+      </inkml:inkSource>
+      <inkml:timestamp xml:id="ts0" timeString="2026-05-19T08:02:40.300"/>
+    </inkml:context>
+    <inkml:brush xml:id="br0">
+      <inkml:brushProperty name="width" value="0.4" units="cm"/>
+      <inkml:brushProperty name="height" value="0.8" units="cm"/>
+      <inkml:brushProperty name="color" value="#00FDFF"/>
+      <inkml:brushProperty name="tip" value="rectangle"/>
+      <inkml:brushProperty name="rasterOp" value="maskPen"/>
+    </inkml:brush>
+  </inkml:definitions>
+  <inkml:trace contextRef="#ctx0" brushRef="#br0">0 0,'100'4,"-13"-2,-13 2,-18-3,-12 0,-3 0,-3 1,5 0,2-1,-2-1,-2 0,-4 0,-2 0,6 0,2 0,3 0,3 0,-1 2,4 0,0 2,1-1,-5 1,-3-2,-6 0,-3 0,-3 0,-6-1,7 1,3-2,3 2,5-2,-9 0,0 0,-8 2,-1 0,-10-1,5 2,-4-3,3 2,5-1,-4 0,2 1,-3-1,-2 0,1 1</inkml:trace>
+</inkml:ink>
+</file>
+
+<file path=ppt/ink/ink23.xml><?xml version="1.0" encoding="utf-8"?>
+<inkml:ink xmlns:inkml="http://www.w3.org/2003/InkML">
+  <inkml:definitions>
+    <inkml:context xml:id="ctx0">
+      <inkml:inkSource xml:id="inkSrc0">
+        <inkml:traceFormat>
+          <inkml:channel name="X" type="integer" min="-2.14748E9" max="2.14748E9" units="cm"/>
+          <inkml:channel name="Y" type="integer" min="-2.14748E9" max="2.14748E9" units="cm"/>
+        </inkml:traceFormat>
+        <inkml:channelProperties>
+          <inkml:channelProperty channel="X" name="resolution" value="1000" units="1/cm"/>
+          <inkml:channelProperty channel="Y" name="resolution" value="1000" units="1/cm"/>
+        </inkml:channelProperties>
+      </inkml:inkSource>
+      <inkml:timestamp xml:id="ts0" timeString="2026-05-19T08:02:42.640"/>
+    </inkml:context>
+    <inkml:brush xml:id="br0">
+      <inkml:brushProperty name="width" value="0.4" units="cm"/>
+      <inkml:brushProperty name="height" value="0.8" units="cm"/>
+      <inkml:brushProperty name="color" value="#00FDFF"/>
+      <inkml:brushProperty name="tip" value="rectangle"/>
+      <inkml:brushProperty name="rasterOp" value="maskPen"/>
+    </inkml:brush>
+  </inkml:definitions>
+  <inkml:trace contextRef="#ctx0" brushRef="#br0">1 1,'58'10,"1"0,-5-1,-3-1,20 4,-12-5,-26-4,-8-1,-11-2</inkml:trace>
+</inkml:ink>
+</file>
+
+<file path=ppt/ink/ink24.xml><?xml version="1.0" encoding="utf-8"?>
+<inkml:ink xmlns:inkml="http://www.w3.org/2003/InkML">
+  <inkml:definitions>
+    <inkml:context xml:id="ctx0">
+      <inkml:inkSource xml:id="inkSrc0">
+        <inkml:traceFormat>
+          <inkml:channel name="X" type="integer" min="-2.14748E9" max="2.14748E9" units="cm"/>
+          <inkml:channel name="Y" type="integer" min="-2.14748E9" max="2.14748E9" units="cm"/>
+        </inkml:traceFormat>
+        <inkml:channelProperties>
+          <inkml:channelProperty channel="X" name="resolution" value="1000" units="1/cm"/>
+          <inkml:channelProperty channel="Y" name="resolution" value="1000" units="1/cm"/>
+        </inkml:channelProperties>
+      </inkml:inkSource>
+      <inkml:timestamp xml:id="ts0" timeString="2026-05-19T08:03:12.293"/>
+    </inkml:context>
+    <inkml:brush xml:id="br0">
+      <inkml:brushProperty name="width" value="0.4" units="cm"/>
+      <inkml:brushProperty name="height" value="0.8" units="cm"/>
+      <inkml:brushProperty name="color" value="#00FDFF"/>
+      <inkml:brushProperty name="tip" value="rectangle"/>
+      <inkml:brushProperty name="rasterOp" value="maskPen"/>
+    </inkml:brush>
+  </inkml:definitions>
+  <inkml:trace contextRef="#ctx0" brushRef="#br0">1 20,'99'-11,"-49"7,1 1,5 1,1 2,41 2,-44-1,0 1,34 2,12 1,-3 0,-9-2,2 1,-16-1,2-3,3 2,9 0,2-2,5 2,-11 0,4-2,-5 2,10-2,-3 0,-8 0,-5 0,-4 0,8 2,4-2,-2 2,3-2,-18 0,5 0,-12 0,-10 0,4-2,-4 2,8-2,4 2,11 0,6-2,6 2,1-4,-8 4,-5-2,-8 1,-12 0,-12 0,-5 1,-6 0,8 0,5-2,1 2,11-3,-6 2,3-1,-10 0,-6 2,-1-1,-3 1,-3 0,-8 0,-6 0</inkml:trace>
+</inkml:ink>
+</file>
+
+<file path=ppt/ink/ink25.xml><?xml version="1.0" encoding="utf-8"?>
+<inkml:ink xmlns:inkml="http://www.w3.org/2003/InkML">
+  <inkml:definitions>
+    <inkml:context xml:id="ctx0">
+      <inkml:inkSource xml:id="inkSrc0">
+        <inkml:traceFormat>
+          <inkml:channel name="X" type="integer" min="-2.14748E9" max="2.14748E9" units="cm"/>
+          <inkml:channel name="Y" type="integer" min="-2.14748E9" max="2.14748E9" units="cm"/>
+        </inkml:traceFormat>
+        <inkml:channelProperties>
+          <inkml:channelProperty channel="X" name="resolution" value="1000" units="1/cm"/>
+          <inkml:channelProperty channel="Y" name="resolution" value="1000" units="1/cm"/>
+        </inkml:channelProperties>
+      </inkml:inkSource>
+      <inkml:timestamp xml:id="ts0" timeString="2026-05-19T08:03:24.511"/>
+    </inkml:context>
+    <inkml:brush xml:id="br0">
+      <inkml:brushProperty name="width" value="0.3" units="cm"/>
+      <inkml:brushProperty name="height" value="0.6" units="cm"/>
+      <inkml:brushProperty name="color" value="#FFFC00"/>
+      <inkml:brushProperty name="tip" value="rectangle"/>
+      <inkml:brushProperty name="rasterOp" value="maskPen"/>
+    </inkml:brush>
+  </inkml:definitions>
+  <inkml:trace contextRef="#ctx0" brushRef="#br0">0 36,'89'-2,"-1"1,10 0,0 0,-12 0,-3-1,-5 2,-4-1,-14 0,-5 0,21-1,17 1,-36 0,24 0,-37 0,9 1,-12-3,2 2,0-1,4 1,1 0,-6-1,1 1,-6-1,6 1,2 0,6 0,-1 0,-2-1,-12 2,2 0,1 0,12 0,0 0,10 0,-14 0,-11 0,-17 0,-13 0</inkml:trace>
+</inkml:ink>
+</file>
+
+<file path=ppt/ink/ink26.xml><?xml version="1.0" encoding="utf-8"?>
+<inkml:ink xmlns:inkml="http://www.w3.org/2003/InkML">
+  <inkml:definitions>
+    <inkml:context xml:id="ctx0">
+      <inkml:inkSource xml:id="inkSrc0">
+        <inkml:traceFormat>
+          <inkml:channel name="X" type="integer" min="-2.14748E9" max="2.14748E9" units="cm"/>
+          <inkml:channel name="Y" type="integer" min="-2.14748E9" max="2.14748E9" units="cm"/>
+        </inkml:traceFormat>
+        <inkml:channelProperties>
+          <inkml:channelProperty channel="X" name="resolution" value="1000" units="1/cm"/>
+          <inkml:channelProperty channel="Y" name="resolution" value="1000" units="1/cm"/>
+        </inkml:channelProperties>
+      </inkml:inkSource>
+      <inkml:timestamp xml:id="ts0" timeString="2026-05-19T08:03:28.233"/>
+    </inkml:context>
+    <inkml:brush xml:id="br0">
+      <inkml:brushProperty name="width" value="0.3" units="cm"/>
+      <inkml:brushProperty name="height" value="0.6" units="cm"/>
+      <inkml:brushProperty name="color" value="#FFFC00"/>
+      <inkml:brushProperty name="tip" value="rectangle"/>
+      <inkml:brushProperty name="rasterOp" value="maskPen"/>
+    </inkml:brush>
+  </inkml:definitions>
+  <inkml:trace contextRef="#ctx0" brushRef="#br0">0 4238,'53'-51,"0"0,-8 8,-4 3,18-19,-21 21,1-5,-4 7,-1-2,-1 3,-5 5,1-1,3 1,2-2,6-5,0 1,2-3,-1 2,-9 7,9-4,-3 1,8-8,-1 0,-12 6,0 0,-7 8,5-6,0 2,0 0,0 2,1-2,5-2,-2 0,9-5,-5 0,5-2,4-2,5-1,11-4,9-5,-1 2,-3 1,-7 3,-1-1,0 1,-6 3,3-1,-9 7,12-8,-3 2,0-1,4-4,-9 4,8-4,-9 6,6-2,-4 3,6-5,-2 2,9 0,16-8,-39 27,0-1,0 1,-1 0,27-22,-12 9,-2-1,10-2,20-8,2 3,-39 20,0 1,35-17,0-1,-17 11,20-8,-40 20,2-1,5-2,2-1,-1 0,-3-1,27-14,-15 2,-20 10,0-4,-7 7,-3-2,2 3,0-1,7-4,0-3,11-8,-5-3,3-3,-10 7,-1-1,-5 5,1-4,-1-2,-1 0,0 1,-4 2,-4 4,-5 5,-5 4,-3 2,-4 6,-2 1,-2 1,0-2,0-3,-2 1,0-3,0 0,-1 1,0 3,-1 0,-1 4,1-3,0 0,2 1</inkml:trace>
+</inkml:ink>
+</file>
+
+<file path=ppt/ink/ink27.xml><?xml version="1.0" encoding="utf-8"?>
+<inkml:ink xmlns:inkml="http://www.w3.org/2003/InkML">
+  <inkml:definitions>
+    <inkml:context xml:id="ctx0">
+      <inkml:inkSource xml:id="inkSrc0">
+        <inkml:traceFormat>
+          <inkml:channel name="X" type="integer" min="-2.14748E9" max="2.14748E9" units="cm"/>
+          <inkml:channel name="Y" type="integer" min="-2.14748E9" max="2.14748E9" units="cm"/>
+        </inkml:traceFormat>
+        <inkml:channelProperties>
+          <inkml:channelProperty channel="X" name="resolution" value="1000" units="1/cm"/>
+          <inkml:channelProperty channel="Y" name="resolution" value="1000" units="1/cm"/>
+        </inkml:channelProperties>
+      </inkml:inkSource>
+      <inkml:timestamp xml:id="ts0" timeString="2026-05-19T08:03:42.173"/>
+    </inkml:context>
+    <inkml:brush xml:id="br0">
+      <inkml:brushProperty name="width" value="0.2" units="cm"/>
+      <inkml:brushProperty name="height" value="0.4" units="cm"/>
+      <inkml:brushProperty name="color" value="#00F900"/>
+      <inkml:brushProperty name="tip" value="rectangle"/>
+      <inkml:brushProperty name="rasterOp" value="maskPen"/>
+    </inkml:brush>
+  </inkml:definitions>
+  <inkml:trace contextRef="#ctx0" brushRef="#br0">1 0,'38'68,"3"-3,-6-16,-5-8,0-2,-12-13,1-1,-4-7,-1 1,1-3,0 4,0-6,-2 2,4 0,4 1,4 4,3-1,-1 0,0 0,-3-3,-1 0,1 0,1-1,6 7,2-2,1 3,3 2,-1 0,5 8,-5-3,2 1,-7-4,3 3,-2-3,1 0,-3-1,-3-5,1 2,-1-3,4 6,4 0,3 5,3 3,0 1,4 4,-3-5,5 4,-3-3,10 4,-2 3,5 2,-4-2,-2 4,1-4,0 6,3-5,-12-5,7 2,-11-5,4 4,1 1,-9-6,5 2,-5-3,4 3,-1-2,8 4,-8-6,3 2,-6-6,-4-2,4-1,-2 1,2 4,-2-4,3 6,-1-1,6 2,-2-1,6 5,-5-5,8 8,-4-6,-5-4,4 2,-11-8,10 9,-2-4,-6-3,2 2,-9-7,2 2,-5-4,4 1,-1 0,4 2,-2-1,3-2,-6-1,9 3,-5-2,5 3,0-1,10 5,10 7,4 2,0 1,-7-4,-1-1,2 3,10 6,-1 3,5 2,-2 3,-3-2,-1 4,-4-9,-2 0,-8-9,8 3,-5-2,6 0,-10-7,-8-6,1 0,-6-2,6 5,-10-6,1 3,4 1,3 7,5 3,2 6,-4-3,4 6,-4-4,1 1,-3 1,6 3,-6-1,5-1,-14-6,6 3,-4 1,1-2,-4-3,-5-5,1 2,6 5,7 8,0-3,3 6,-3-5,2 2,-8-5,4 2,-4-6,3 3,0-1,1-1,2 6,-3-5,-1 1,-1-1,7 8,10 14,3 4,-1 3,-1-4,-4-4,0-3,-5-9,-8-8,-1-5,-4-4,6 1,0-2,5 3,5 3,-1-1,4 4,-7-7,8 7,0-1,11 6,-1 1,0-2,2 6,-7-4,5 6,-13-10,4 5,-2-3,1 4,0-3,-8-4,3 2,-4-2,4 4,-6-5,-3-2,-3-1,4 0,0 2,9 5,-3 0,1-4,-6-6,-7-7,0 0,3 2,5 4,-2-1,8 8,-2-2,7 9,2 2,0 0,6 6,-6-5,10 6,-5-1,18 15,-35-31,1 0,1 1,-2-1,31 28,-9-8,-7-5,2 0,1-2,-3-2,-4-3,3 1,-1-1,2 2,-7-7,1 0,-3-1,2 0,1 2,-3-2,0-2,4 0,-4-3,2-4,-2-2,1-3,-6-3,-1-4,-6-2,2 0,2 1,-6-3,4 2,-7-3,13 7,1 2,10 3,-4 1,5 0,-4 1,-4-2,-8-4,-7-3,0-2,5 6,-3-2,-1 1,-6-1,-2-3,1 2,-1 1,12 6,0 1,8 6,-13-10,-5-1,-12-8,-4-3,-3-2,1 1,6 10,46 46,-32-32,26 23,-44-48,-5-4,4 4</inkml:trace>
+</inkml:ink>
+</file>
+
+<file path=ppt/ink/ink28.xml><?xml version="1.0" encoding="utf-8"?>
+<inkml:ink xmlns:inkml="http://www.w3.org/2003/InkML">
+  <inkml:definitions>
+    <inkml:context xml:id="ctx0">
+      <inkml:inkSource xml:id="inkSrc0">
+        <inkml:traceFormat>
+          <inkml:channel name="X" type="integer" min="-2.14748E9" max="2.14748E9" units="cm"/>
+          <inkml:channel name="Y" type="integer" min="-2.14748E9" max="2.14748E9" units="cm"/>
+        </inkml:traceFormat>
+        <inkml:channelProperties>
+          <inkml:channelProperty channel="X" name="resolution" value="1000" units="1/cm"/>
+          <inkml:channelProperty channel="Y" name="resolution" value="1000" units="1/cm"/>
+        </inkml:channelProperties>
+      </inkml:inkSource>
+      <inkml:timestamp xml:id="ts0" timeString="2026-05-19T08:04:09.770"/>
+    </inkml:context>
+    <inkml:brush xml:id="br0">
+      <inkml:brushProperty name="width" value="0.2" units="cm"/>
+      <inkml:brushProperty name="height" value="0.4" units="cm"/>
+      <inkml:brushProperty name="color" value="#00FDFF"/>
+      <inkml:brushProperty name="tip" value="rectangle"/>
+      <inkml:brushProperty name="rasterOp" value="maskPen"/>
+    </inkml:brush>
+  </inkml:definitions>
+  <inkml:trace contextRef="#ctx0" brushRef="#br0">1 263,'58'-7,"10"1,0 3,-2 1,-11 2,-13 0,-7 0,-5 0,-2 0,-1 0,3 0,-5 0,-4-1,-2 1,1-3,6 1,3-1,4-2,-3 3,1-2,2 2,-1 1,4 1,0-2,-2 2,0-2,-11 1,-4 1,-6-2,0 1,2-2,-1 2,2-2,3 3,-1-3,7 1,-3 0,0 1,-2 1,-6 0,0-1,-3 0,6 1,-5-1,-1 1,6 0,-2 0,18 0,-4 0,6 0,-8 0,-5 0,-10 0,6 0,-2 0,11 0,-9 0,7-25,-19 9,6-16,-11 21,-1 5,-66-5,-5-1,13 2,-2 0,-35-5,33 3,12 6,17 3,-3 0,-8 1,2 0,-2 0,12 1,9 1,4-1,3 0,0 0,1 0,-2 1,3 0,-1 0,1 0,-5 0,1 0,-9-2,0 1,-7 0,-3 1,-3-1,-2 0,9-1,1 1,9 0,-2 0,2 0,2 0,-6 3,-2 0,-6 1,-4 0,5 0,1 0,7 1,8 0,4-1,6-1,-2 3,-1-1,3 2,-2 4,6-4,-2 5,2-2,1 0,15 6,-9-9,10 2</inkml:trace>
+</inkml:ink>
+</file>
+
+<file path=ppt/ink/ink29.xml><?xml version="1.0" encoding="utf-8"?>
+<inkml:ink xmlns:inkml="http://www.w3.org/2003/InkML">
+  <inkml:definitions>
+    <inkml:context xml:id="ctx0">
+      <inkml:inkSource xml:id="inkSrc0">
+        <inkml:traceFormat>
+          <inkml:channel name="X" type="integer" min="-2.14748E9" max="2.14748E9" units="cm"/>
+          <inkml:channel name="Y" type="integer" min="-2.14748E9" max="2.14748E9" units="cm"/>
+        </inkml:traceFormat>
+        <inkml:channelProperties>
+          <inkml:channelProperty channel="X" name="resolution" value="1000" units="1/cm"/>
+          <inkml:channelProperty channel="Y" name="resolution" value="1000" units="1/cm"/>
+        </inkml:channelProperties>
+      </inkml:inkSource>
+      <inkml:timestamp xml:id="ts0" timeString="2026-05-19T08:04:14.235"/>
+    </inkml:context>
+    <inkml:brush xml:id="br0">
+      <inkml:brushProperty name="width" value="0.2" units="cm"/>
+      <inkml:brushProperty name="height" value="0.4" units="cm"/>
+      <inkml:brushProperty name="color" value="#00FDFF"/>
+      <inkml:brushProperty name="tip" value="rectangle"/>
+      <inkml:brushProperty name="rasterOp" value="maskPen"/>
+    </inkml:brush>
+  </inkml:definitions>
+  <inkml:trace contextRef="#ctx0" brushRef="#br0">32 150,'49'0,"10"0,-18 0,10 0,-11-1,1 0,-2 0,-1 0,-1 1,-7 0,1 0,-3 0,1 0,-7 0,-4 0,-6 0,0 0,4 0,1 0,-1-2,-5 2,-76-12,-29-1,35 6,-1 0,7 0,5 3,6 1,19 3,2-1,-1 1,-2-1,2 0,0-1,1 1,-9 0,1 0,9 1,6 0,66-22,34 5,-32 3,0 1,37 1,-46 8,-26 4,2-1,5 1,9 0,2 0,10 4,-3-1,6 2,-11-2,-7-3,-15 0,-11 0,26 10,-9-2,33 10,-18-5,-3-2,-15-5,-10-4,-8-2</inkml:trace>
+</inkml:ink>
+</file>
+
+<file path=ppt/ink/ink3.xml><?xml version="1.0" encoding="utf-8"?>
+<inkml:ink xmlns:inkml="http://www.w3.org/2003/InkML">
+  <inkml:definitions>
+    <inkml:context xml:id="ctx0">
+      <inkml:inkSource xml:id="inkSrc0">
+        <inkml:traceFormat>
+          <inkml:channel name="X" type="integer" min="-2.14748E9" max="2.14748E9" units="cm"/>
+          <inkml:channel name="Y" type="integer" min="-2.14748E9" max="2.14748E9" units="cm"/>
+        </inkml:traceFormat>
+        <inkml:channelProperties>
+          <inkml:channelProperty channel="X" name="resolution" value="1000" units="1/cm"/>
+          <inkml:channelProperty channel="Y" name="resolution" value="1000" units="1/cm"/>
+        </inkml:channelProperties>
+      </inkml:inkSource>
+      <inkml:timestamp xml:id="ts0" timeString="2026-05-19T07:47:28.430"/>
+    </inkml:context>
+    <inkml:brush xml:id="br0">
+      <inkml:brushProperty name="width" value="0.4" units="cm"/>
+      <inkml:brushProperty name="height" value="0.8" units="cm"/>
+      <inkml:brushProperty name="color" value="#FFACD5"/>
+      <inkml:brushProperty name="tip" value="rectangle"/>
+      <inkml:brushProperty name="rasterOp" value="maskPen"/>
+    </inkml:brush>
+  </inkml:definitions>
+  <inkml:trace contextRef="#ctx0" brushRef="#br0">1 34,'89'0,"0"0,-15 0,0 0,17 0,-2 0,-20 0,-4 0,-11 0,-1 0,6-1,-2 0,27 0,11-2,-19 2,-10-1,-7 0,-6 0,-5 0,-7 1,-3-1,5 2,4-2,16 2,6 0,10-2,19 0,-39 0,2 0,16 1,3 0,11 0,0 0,-7 1,2-1,8 1,-1 0,-12 0,0 0,17 0,4 0,-30 1,2 0,-2 1,26-1,-1 0,-27 2,0-1,-3 1,10-2,-1 1,5 1,-1-1,-7-1,-3-1,-3 1,0 0,1-2,-2 0,-12 0,-3 0,3 0,-3-1,17 1,-20 0,-19 0,-7 1,0-2,5 2,2 0,16-2,16 1,20 0,-11 1,-17 0,-30 0,-20 0</inkml:trace>
+</inkml:ink>
+</file>
+
+<file path=ppt/ink/ink30.xml><?xml version="1.0" encoding="utf-8"?>
+<inkml:ink xmlns:inkml="http://www.w3.org/2003/InkML">
+  <inkml:definitions>
+    <inkml:context xml:id="ctx0">
+      <inkml:inkSource xml:id="inkSrc0">
+        <inkml:traceFormat>
+          <inkml:channel name="X" type="integer" min="-2.14748E9" max="2.14748E9" units="cm"/>
+          <inkml:channel name="Y" type="integer" min="-2.14748E9" max="2.14748E9" units="cm"/>
+        </inkml:traceFormat>
+        <inkml:channelProperties>
+          <inkml:channelProperty channel="X" name="resolution" value="1000" units="1/cm"/>
+          <inkml:channelProperty channel="Y" name="resolution" value="1000" units="1/cm"/>
+        </inkml:channelProperties>
+      </inkml:inkSource>
+      <inkml:timestamp xml:id="ts0" timeString="2026-05-19T08:04:25.902"/>
+    </inkml:context>
+    <inkml:brush xml:id="br0">
+      <inkml:brushProperty name="width" value="0.2" units="cm"/>
+      <inkml:brushProperty name="height" value="0.4" units="cm"/>
+      <inkml:brushProperty name="color" value="#FFACD5"/>
+      <inkml:brushProperty name="tip" value="rectangle"/>
+      <inkml:brushProperty name="rasterOp" value="maskPen"/>
+    </inkml:brush>
+  </inkml:definitions>
+  <inkml:trace contextRef="#ctx0" brushRef="#br0">0 1,'61'12,"9"1,9 2,-12-4,-15-5,-25-4,-11-1,-8 0,10-1,9 0,16 0,-1 0,-4 0,-15 0,-9 0,-8 0,6 0,3 0</inkml:trace>
+</inkml:ink>
+</file>
+
+<file path=ppt/ink/ink31.xml><?xml version="1.0" encoding="utf-8"?>
+<inkml:ink xmlns:inkml="http://www.w3.org/2003/InkML">
+  <inkml:definitions>
+    <inkml:context xml:id="ctx0">
+      <inkml:inkSource xml:id="inkSrc0">
+        <inkml:traceFormat>
+          <inkml:channel name="X" type="integer" min="-2.14748E9" max="2.14748E9" units="cm"/>
+          <inkml:channel name="Y" type="integer" min="-2.14748E9" max="2.14748E9" units="cm"/>
+        </inkml:traceFormat>
+        <inkml:channelProperties>
+          <inkml:channelProperty channel="X" name="resolution" value="1000" units="1/cm"/>
+          <inkml:channelProperty channel="Y" name="resolution" value="1000" units="1/cm"/>
+        </inkml:channelProperties>
+      </inkml:inkSource>
+      <inkml:timestamp xml:id="ts0" timeString="2026-05-19T08:04:29.058"/>
+    </inkml:context>
+    <inkml:brush xml:id="br0">
+      <inkml:brushProperty name="width" value="0.2" units="cm"/>
+      <inkml:brushProperty name="height" value="0.4" units="cm"/>
+      <inkml:brushProperty name="color" value="#FFACD5"/>
+      <inkml:brushProperty name="tip" value="rectangle"/>
+      <inkml:brushProperty name="rasterOp" value="maskPen"/>
+    </inkml:brush>
+  </inkml:definitions>
+  <inkml:trace contextRef="#ctx0" brushRef="#br0">1 41,'75'8,"1"1,9-2,3-1,6-1,0-2,-6-1,-3-2,-16 0,-5-1,-9-1,-4-1,31-2,8-6,-9 1,10-2,-8 1,3 4,-14 0,-5 4,-7 1,7 1,12 0,10 0,10 1,-44 0,1 1,2-1,-1 1,-6 0,0 0,45-1,-13 1,-4 0,-15 0,-2-2,-23 1,10-2,-1 2,6-2,3 2,-2-2,-4 2,-1-1,7 0,5 0,14 1,-3 0,-3 1,2 1,-13 2,7 0,-17-1,6 0,-6-2,4 1,-5 0,-16-1,0-1,-6 0,22 0,-1 0,15 0,-13 0,-2 0,-9 0,4 0,8 0,12 0,-7 0,-6 0,-23 0,-8 0,-8-2,-2 2,7-2,-8 2,5 0</inkml:trace>
+</inkml:ink>
+</file>
+
+<file path=ppt/ink/ink32.xml><?xml version="1.0" encoding="utf-8"?>
+<inkml:ink xmlns:inkml="http://www.w3.org/2003/InkML">
+  <inkml:definitions>
+    <inkml:context xml:id="ctx0">
+      <inkml:inkSource xml:id="inkSrc0">
+        <inkml:traceFormat>
+          <inkml:channel name="X" type="integer" min="-2.14748E9" max="2.14748E9" units="cm"/>
+          <inkml:channel name="Y" type="integer" min="-2.14748E9" max="2.14748E9" units="cm"/>
+        </inkml:traceFormat>
+        <inkml:channelProperties>
+          <inkml:channelProperty channel="X" name="resolution" value="1000" units="1/cm"/>
+          <inkml:channelProperty channel="Y" name="resolution" value="1000" units="1/cm"/>
+        </inkml:channelProperties>
+      </inkml:inkSource>
+      <inkml:timestamp xml:id="ts0" timeString="2026-05-19T08:05:20.860"/>
+    </inkml:context>
+    <inkml:brush xml:id="br0">
+      <inkml:brushProperty name="width" value="0.2" units="cm"/>
+      <inkml:brushProperty name="height" value="0.4" units="cm"/>
+      <inkml:brushProperty name="color" value="#FFACD5"/>
+      <inkml:brushProperty name="tip" value="rectangle"/>
+      <inkml:brushProperty name="rasterOp" value="maskPen"/>
+    </inkml:brush>
+  </inkml:definitions>
+  <inkml:trace contextRef="#ctx0" brushRef="#br0">1 0,'51'2,"1"0,11 1,3 0,8-1,3 0,9 0,1 0,-6 0,-1 0,1-2,-1 1,-4-1,0 0,5 0,-1 0,-7-1,-1 1,7-1,-1 1,-15 1,-1 0,5 0,0 0,-6 1,-2-1,6 0,-1-1,0 1,1 0,6-1,-1 1,-12 0,-1 0,-1-1,-1 0,41 0,2 1,-1 0,-7 0,-12-1,-8-1,-2 0,4 0,-1 1,9 3,-7-2,8 4,0-2,4 4,-2-3,-1 3,-15-6,8 3,-13-4,1 2,-18-2,-6 0,-3 0,3 0,3 0,-5-1,7 0,1 0,11 0,4 1,1 0,-10 0,-3 0,-15 0,1 1,-5 0,0 0,3 0,0-1,9 0,6 0,8 0,-8 1,-10 0,-20 0,-11 0</inkml:trace>
+</inkml:ink>
+</file>
+
+<file path=ppt/ink/ink33.xml><?xml version="1.0" encoding="utf-8"?>
+<inkml:ink xmlns:inkml="http://www.w3.org/2003/InkML">
+  <inkml:definitions>
+    <inkml:context xml:id="ctx0">
+      <inkml:inkSource xml:id="inkSrc0">
+        <inkml:traceFormat>
+          <inkml:channel name="X" type="integer" min="-2.14748E9" max="2.14748E9" units="cm"/>
+          <inkml:channel name="Y" type="integer" min="-2.14748E9" max="2.14748E9" units="cm"/>
+        </inkml:traceFormat>
+        <inkml:channelProperties>
+          <inkml:channelProperty channel="X" name="resolution" value="1000" units="1/cm"/>
+          <inkml:channelProperty channel="Y" name="resolution" value="1000" units="1/cm"/>
+        </inkml:channelProperties>
+      </inkml:inkSource>
+      <inkml:timestamp xml:id="ts0" timeString="2026-05-19T08:06:42.001"/>
+    </inkml:context>
+    <inkml:brush xml:id="br0">
+      <inkml:brushProperty name="width" value="0.2" units="cm"/>
+      <inkml:brushProperty name="height" value="0.4" units="cm"/>
+      <inkml:brushProperty name="color" value="#A9D8FF"/>
+      <inkml:brushProperty name="tip" value="rectangle"/>
+      <inkml:brushProperty name="rasterOp" value="maskPen"/>
+    </inkml:brush>
+  </inkml:definitions>
+  <inkml:trace contextRef="#ctx0" brushRef="#br0">1 1,'66'2,"13"2,11 0,-10 0,-8 0,-30-2,-13-1,-15-1,-2 0,-2 0,6 0,-2 0,-3 0,2 0,-3 0,1 0,3 0,-6 0,16 6,2 1,12 5,-1-4,-9-3,-13-2,-9-2,-9 25,1-15,-9 15,-12-22,-16-4,-20 0,-1 0,5 0,13 0,9 0,11 0,6 0,0 0,-2 0,-4 0,-3 0,1 0,-6 0,0 0,-1-2,2 2,5-2,1 2,1-1,0 0,2 0,6 1,1 0,68 0,23 0,18 0,-13 0,-58 0,-11 0,5-2,9 0,21-1,14 1,4 2,-7 0,-18 0,-23 0,2-7,9-2,4-2,21 2,-16 7,16 0,-27 2,-3 0,-22 0</inkml:trace>
+</inkml:ink>
+</file>
+
+<file path=ppt/ink/ink34.xml><?xml version="1.0" encoding="utf-8"?>
+<inkml:ink xmlns:inkml="http://www.w3.org/2003/InkML">
+  <inkml:definitions>
+    <inkml:context xml:id="ctx0">
+      <inkml:inkSource xml:id="inkSrc0">
+        <inkml:traceFormat>
+          <inkml:channel name="X" type="integer" min="-2.14748E9" max="2.14748E9" units="cm"/>
+          <inkml:channel name="Y" type="integer" min="-2.14748E9" max="2.14748E9" units="cm"/>
+        </inkml:traceFormat>
+        <inkml:channelProperties>
+          <inkml:channelProperty channel="X" name="resolution" value="1000" units="1/cm"/>
+          <inkml:channelProperty channel="Y" name="resolution" value="1000" units="1/cm"/>
+        </inkml:channelProperties>
+      </inkml:inkSource>
+      <inkml:timestamp xml:id="ts0" timeString="2026-05-19T08:08:24.425"/>
+    </inkml:context>
+    <inkml:brush xml:id="br0">
+      <inkml:brushProperty name="width" value="0.2" units="cm"/>
+      <inkml:brushProperty name="height" value="0.4" units="cm"/>
+      <inkml:brushProperty name="color" value="#A9D8FF"/>
+      <inkml:brushProperty name="tip" value="rectangle"/>
+      <inkml:brushProperty name="rasterOp" value="maskPen"/>
+    </inkml:brush>
+  </inkml:definitions>
+  <inkml:trace contextRef="#ctx0" brushRef="#br0">1 158,'28'-27,"0"0,-8 8,-3 6,-6 1,-7 8,4-3,1 1,7-5,1 2,1-2,-5 5,-1 0,-19 35,6-20,-10 24,2-26,-9 1,-5 1,-1 1,11-4,8-3,5-3</inkml:trace>
+</inkml:ink>
+</file>
+
+<file path=ppt/ink/ink35.xml><?xml version="1.0" encoding="utf-8"?>
+<inkml:ink xmlns:inkml="http://www.w3.org/2003/InkML">
+  <inkml:definitions>
+    <inkml:context xml:id="ctx0">
+      <inkml:inkSource xml:id="inkSrc0">
+        <inkml:traceFormat>
+          <inkml:channel name="X" type="integer" min="-2.14748E9" max="2.14748E9" units="cm"/>
+          <inkml:channel name="Y" type="integer" min="-2.14748E9" max="2.14748E9" units="cm"/>
+        </inkml:traceFormat>
+        <inkml:channelProperties>
+          <inkml:channelProperty channel="X" name="resolution" value="1000" units="1/cm"/>
+          <inkml:channelProperty channel="Y" name="resolution" value="1000" units="1/cm"/>
+        </inkml:channelProperties>
+      </inkml:inkSource>
+      <inkml:timestamp xml:id="ts0" timeString="2026-05-19T08:08:26.405"/>
+    </inkml:context>
+    <inkml:brush xml:id="br0">
+      <inkml:brushProperty name="width" value="0.2" units="cm"/>
+      <inkml:brushProperty name="height" value="0.4" units="cm"/>
+      <inkml:brushProperty name="color" value="#A9D8FF"/>
+      <inkml:brushProperty name="tip" value="rectangle"/>
+      <inkml:brushProperty name="rasterOp" value="maskPen"/>
+    </inkml:brush>
+  </inkml:definitions>
+  <inkml:trace contextRef="#ctx0" brushRef="#br0">0 0,'8'36,"-1"-8,0-21,2-2,1 1,1-1,1 0,-1-3,8 0,3-2,8 0,-3 2,-2-2,-2 1,-8-1,-1 0,-2 0,3-2,8-1,-2-2,-2 0,-11 3,-3 0</inkml:trace>
+</inkml:ink>
+</file>
+
+<file path=ppt/ink/ink36.xml><?xml version="1.0" encoding="utf-8"?>
+<inkml:ink xmlns:inkml="http://www.w3.org/2003/InkML">
+  <inkml:definitions>
+    <inkml:context xml:id="ctx0">
+      <inkml:inkSource xml:id="inkSrc0">
+        <inkml:traceFormat>
+          <inkml:channel name="X" type="integer" min="-2.14748E9" max="2.14748E9" units="cm"/>
+          <inkml:channel name="Y" type="integer" min="-2.14748E9" max="2.14748E9" units="cm"/>
+        </inkml:traceFormat>
+        <inkml:channelProperties>
+          <inkml:channelProperty channel="X" name="resolution" value="1000" units="1/cm"/>
+          <inkml:channelProperty channel="Y" name="resolution" value="1000" units="1/cm"/>
+        </inkml:channelProperties>
+      </inkml:inkSource>
+      <inkml:timestamp xml:id="ts0" timeString="2026-05-19T08:09:01.649"/>
+    </inkml:context>
+    <inkml:brush xml:id="br0">
+      <inkml:brushProperty name="width" value="0.2" units="cm"/>
+      <inkml:brushProperty name="height" value="0.4" units="cm"/>
+      <inkml:brushProperty name="color" value="#FFFC00"/>
+      <inkml:brushProperty name="tip" value="rectangle"/>
+      <inkml:brushProperty name="rasterOp" value="maskPen"/>
+    </inkml:brush>
+  </inkml:definitions>
+  <inkml:trace contextRef="#ctx0" brushRef="#br0">1 1,'71'8,"1"-1,17 2,6-2,-27-1,3 0,0-1,4 1,1-1,-1 0,-5-2,-2 1,1-1,30 2,-2-1,-6-1,-2 0,-2-1,-3 0,-15 0,-3-1,-3 1,-2-1,-8 0,0 1,8 2,1-1,-2-1,2-1,7 1,1 0,1-1,1-2,1 1,0 0,-2-1,-2 0,-3 1,-1 0,-5-1,-1 0,-3 1,-1 0,2 2,-1 0,-3 0,0 1,12 2,2 1,-2-1,0 0,7 1,-1 0,-7-2,1 1,5 2,2-1,-3 1,1 0,9 0,0-1,-8 1,1-1,7-1,1 1,-4 0,3 0,12 0,1 0,-14-2,0 0,8-2,-2 0,-18-1,-2-1,0 1,-1 0,-7-1,-4 0,26 2,4-2,-16 0,12 0,-8 0,17 0,-4 0,7 0,-18 0,-4 0,-15 0,-4 0,-6 0,-10 0,4 0,1 0,11 0,-1 0,18 2,-5-1,26 0,-5-1,-29 0,2 0,3 0,1 0,7 0,1 0,3-1,1-1,-1 1,-2-1,0 0,-2-1,-2 1,-1 0,-2 1,-1 0,-9 1,-1-1,2 1,-1 0,38 0,8 0,-5 0,-40 1,2 0,-1 1,1 0,3 0,1 1,-2 0,0 0,-4-1,-1 1,42 2,6 0,-9 1,-34-3,1 0,-6 0,1-1,9 0,1 0,-4-1,0 0,8-1,1 0,2-1,1 0,1 0,0 1,-11-1,-4 0,33 0,-42 0,-26 0,-11 1,-9 0</inkml:trace>
+</inkml:ink>
+</file>
+
+<file path=ppt/ink/ink37.xml><?xml version="1.0" encoding="utf-8"?>
+<inkml:ink xmlns:inkml="http://www.w3.org/2003/InkML">
+  <inkml:definitions>
+    <inkml:context xml:id="ctx0">
+      <inkml:inkSource xml:id="inkSrc0">
+        <inkml:traceFormat>
+          <inkml:channel name="X" type="integer" min="-2.14748E9" max="2.14748E9" units="cm"/>
+          <inkml:channel name="Y" type="integer" min="-2.14748E9" max="2.14748E9" units="cm"/>
+        </inkml:traceFormat>
+        <inkml:channelProperties>
+          <inkml:channelProperty channel="X" name="resolution" value="1000" units="1/cm"/>
+          <inkml:channelProperty channel="Y" name="resolution" value="1000" units="1/cm"/>
+        </inkml:channelProperties>
+      </inkml:inkSource>
+      <inkml:timestamp xml:id="ts0" timeString="2026-05-19T08:09:13.035"/>
+    </inkml:context>
+    <inkml:brush xml:id="br0">
+      <inkml:brushProperty name="width" value="0.2" units="cm"/>
+      <inkml:brushProperty name="height" value="0.4" units="cm"/>
+      <inkml:brushProperty name="color" value="#FFFC00"/>
+      <inkml:brushProperty name="tip" value="rectangle"/>
+      <inkml:brushProperty name="rasterOp" value="maskPen"/>
+    </inkml:brush>
+  </inkml:definitions>
+  <inkml:trace contextRef="#ctx0" brushRef="#br0">0 139,'70'-8,"22"1,-29 3,3 0,5 0,1 0,10-1,-1 0,-8 0,-1 1,-5 0,-2 1,-11 1,-3 0,29 0,-8 0,-5-1,-6 2,-2-2,-4 0,2-2,-3-2,0 0,-2-1,2 1,11 2,2 1,19-2,13 3,-44 1,0 1,-3 0,0 0,1 1,-3 0,30 0,5 0,-13 0,-2 0,14 0,12 0,-32 0,2 0,-3 1,1-1,11 1,0 0,-16 0,-2 1,5 0,-3 0,29 0,-9-1,-22-2,-6 1,-5-3,-4 1,18-2,20 1,-24 1,3 0,5 1,4 0,18 1,2-1,-10 1,1 0,15 0,0 0,-18 0,-2 1,8 0,-2 1,-8-1,-2 0,1 0,-1 1,-11-2,-1 0,-4 0,0 0,45 0,-41 0,2 0,7 2,1 1,1 0,2 0,5 2,0 1,-7-1,0-1,7 2,0-1,-7-3,0 1,8 2,1 1,1-1,0 1,3 2,-1 0,-4-1,-3-1,-11 0,-4-1,35-2,-24 0,-11-3,-12 0,9 0,9 1,31 3,-36-2,5 1,29 5,5 1,-1 1,0 1,-30-4,0 0,-5 0,9 2,-8-2,6-1,-39-5,-26-1,-3 0</inkml:trace>
+</inkml:ink>
+</file>
+
+<file path=ppt/ink/ink4.xml><?xml version="1.0" encoding="utf-8"?>
+<inkml:ink xmlns:inkml="http://www.w3.org/2003/InkML">
+  <inkml:definitions>
+    <inkml:context xml:id="ctx0">
+      <inkml:inkSource xml:id="inkSrc0">
+        <inkml:traceFormat>
+          <inkml:channel name="X" type="integer" min="-2.14748E9" max="2.14748E9" units="cm"/>
+          <inkml:channel name="Y" type="integer" min="-2.14748E9" max="2.14748E9" units="cm"/>
+        </inkml:traceFormat>
+        <inkml:channelProperties>
+          <inkml:channelProperty channel="X" name="resolution" value="1000" units="1/cm"/>
+          <inkml:channelProperty channel="Y" name="resolution" value="1000" units="1/cm"/>
+        </inkml:channelProperties>
+      </inkml:inkSource>
+      <inkml:timestamp xml:id="ts0" timeString="2026-05-19T07:49:13.641"/>
+    </inkml:context>
+    <inkml:brush xml:id="br0">
+      <inkml:brushProperty name="width" value="0.4" units="cm"/>
+      <inkml:brushProperty name="height" value="0.8" units="cm"/>
+      <inkml:brushProperty name="color" value="#FFACD5"/>
+      <inkml:brushProperty name="tip" value="rectangle"/>
+      <inkml:brushProperty name="rasterOp" value="maskPen"/>
+    </inkml:brush>
+  </inkml:definitions>
+  <inkml:trace contextRef="#ctx0" brushRef="#br0">0 134,'76'-15,"0"0,8 1,5 3,-9 4,5 3,2 0,7 1,2 1,2 0,-22 1,0 0,1 0,2 1,9-1,2 1,0 1,-3-1,-9 0,-2 0,-1 0,1 0,2 0,1 0,-1 1,-2-1,12 1,-3-1,-2 0,-12 1,-2 0,0-1,-1 0,0 1,-1-1,21 0,-1 0,3 0,-1 0,-7-1,0 1,-4-2,-1 0,-12 0,-1 0,6-1,0-1,-4 0,1-1,4 1,1-1,2-1,-3 0,-10 3,-1 0,8 0,0 1,-2 1,0 1,7 0,2 0,3 0,1 0,-2 0,0 1,9 0,2-1,-2 1,1 0,10 0,-1 1,-10-2,-2 1,1 0,-3 1,-7-2,-3 1,-8 0,-3-1,-2 1,-2-1,-5 0,-3 0,36 0,3 0,-18 0,-9 0,-10 0,-9 0,8 0,5 2,0 1,-9 1,-22-2,-13-1,-9-1</inkml:trace>
+</inkml:ink>
+</file>
+
+<file path=ppt/ink/ink5.xml><?xml version="1.0" encoding="utf-8"?>
+<inkml:ink xmlns:inkml="http://www.w3.org/2003/InkML">
+  <inkml:definitions>
+    <inkml:context xml:id="ctx0">
+      <inkml:inkSource xml:id="inkSrc0">
+        <inkml:traceFormat>
+          <inkml:channel name="X" type="integer" min="-2.14748E9" max="2.14748E9" units="cm"/>
+          <inkml:channel name="Y" type="integer" min="-2.14748E9" max="2.14748E9" units="cm"/>
+        </inkml:traceFormat>
+        <inkml:channelProperties>
+          <inkml:channelProperty channel="X" name="resolution" value="1000" units="1/cm"/>
+          <inkml:channelProperty channel="Y" name="resolution" value="1000" units="1/cm"/>
+        </inkml:channelProperties>
+      </inkml:inkSource>
+      <inkml:timestamp xml:id="ts0" timeString="2026-05-19T07:50:43.647"/>
+    </inkml:context>
+    <inkml:brush xml:id="br0">
+      <inkml:brushProperty name="width" value="0.4" units="cm"/>
+      <inkml:brushProperty name="height" value="0.8" units="cm"/>
+      <inkml:brushProperty name="color" value="#FFACD5"/>
+      <inkml:brushProperty name="tip" value="rectangle"/>
+      <inkml:brushProperty name="rasterOp" value="maskPen"/>
+    </inkml:brush>
+  </inkml:definitions>
+  <inkml:trace contextRef="#ctx0" brushRef="#br0">0 172,'60'-18,"0"1,3 0,3 3,0 6,2 3,10-1,3 0,10 1,2 0,2 0,1 0,-28 2,0 0,-1 0,18-2,0-1,8 1,-2 0,-21 0,-2 1,4 1,0-1,-4 1,-2 1,-1 0,1 0,9 0,2 1,-5-1,1 2,12 1,1 0,-11 0,-2 0,-2 1,-1-1,1 1,-2 0,-12-1,-3 1,5 0,-3-1,31 3,-15-1,-5 2,19 2,12 2,-34-4,2 0,1 1,1 0,-2-2,0 0,-1 2,-2-1,-9-1,-1-1,44 4,-21-2,-14-2,-3-1,2 1,6-2,9 3,2-2,17 2,0-1,-44-1,1 0,40-1,-19 1,-18-2,-31 0,16 0,-7 1,10 0,-5 1,-19-1,3 0,-2 2,1 0</inkml:trace>
+</inkml:ink>
+</file>
+
+<file path=ppt/ink/ink6.xml><?xml version="1.0" encoding="utf-8"?>
+<inkml:ink xmlns:inkml="http://www.w3.org/2003/InkML">
+  <inkml:definitions>
+    <inkml:context xml:id="ctx0">
+      <inkml:inkSource xml:id="inkSrc0">
+        <inkml:traceFormat>
+          <inkml:channel name="X" type="integer" min="-2.14748E9" max="2.14748E9" units="cm"/>
+          <inkml:channel name="Y" type="integer" min="-2.14748E9" max="2.14748E9" units="cm"/>
+        </inkml:traceFormat>
+        <inkml:channelProperties>
+          <inkml:channelProperty channel="X" name="resolution" value="1000" units="1/cm"/>
+          <inkml:channelProperty channel="Y" name="resolution" value="1000" units="1/cm"/>
+        </inkml:channelProperties>
+      </inkml:inkSource>
+      <inkml:timestamp xml:id="ts0" timeString="2026-05-19T07:50:45.913"/>
+    </inkml:context>
+    <inkml:brush xml:id="br0">
+      <inkml:brushProperty name="width" value="0.4" units="cm"/>
+      <inkml:brushProperty name="height" value="0.8" units="cm"/>
+      <inkml:brushProperty name="color" value="#FFACD5"/>
+      <inkml:brushProperty name="tip" value="rectangle"/>
+      <inkml:brushProperty name="rasterOp" value="maskPen"/>
+    </inkml:brush>
+  </inkml:definitions>
+  <inkml:trace contextRef="#ctx0" brushRef="#br0">1 91,'54'-5,"1"1,12-1,4-1,15-1,2-1,5 1,2 1,-26 2,1 0,-2 1,22-1,-1 1,6 1,-2 0,-13 0,-2 1,-9 1,-1-1,-1 1,-3-1,-9 1,-2 0,5 0,-1 0,1 0,-3 0,33-1,9 1,-10-2,11-2,-47 3,-1-1,43-1,-2 2,1 0,6 1,0 2,-10-2,-13 2,-9-2,9 2,4 2,-29-2,1 0,2 1,2 1,14-1,2 0,-1 1,1 1,14 1,0-1,-12 0,-2 0,-5 0,-4 0,33-1,-32-2,-18-1,-13-1,-2 1,10 0,19 1,21 0,11 0,0 1,-3 0,-14-1,-2 1,-18 0,-17-1,-18 0,0-2,-3 1,12 0,4 0,12-1,9 0,1 0,-7 0,-14 0,-16 0,7-1,-4 1</inkml:trace>
+</inkml:ink>
+</file>
+
+<file path=ppt/ink/ink7.xml><?xml version="1.0" encoding="utf-8"?>
+<inkml:ink xmlns:inkml="http://www.w3.org/2003/InkML">
+  <inkml:definitions>
+    <inkml:context xml:id="ctx0">
+      <inkml:inkSource xml:id="inkSrc0">
+        <inkml:traceFormat>
+          <inkml:channel name="X" type="integer" min="-2.14748E9" max="2.14748E9" units="cm"/>
+          <inkml:channel name="Y" type="integer" min="-2.14748E9" max="2.14748E9" units="cm"/>
+        </inkml:traceFormat>
+        <inkml:channelProperties>
+          <inkml:channelProperty channel="X" name="resolution" value="1000" units="1/cm"/>
+          <inkml:channelProperty channel="Y" name="resolution" value="1000" units="1/cm"/>
+        </inkml:channelProperties>
+      </inkml:inkSource>
+      <inkml:timestamp xml:id="ts0" timeString="2026-05-19T07:50:58.202"/>
+    </inkml:context>
+    <inkml:brush xml:id="br0">
+      <inkml:brushProperty name="width" value="0.4" units="cm"/>
+      <inkml:brushProperty name="height" value="0.8" units="cm"/>
+      <inkml:brushProperty name="color" value="#FFACD5"/>
+      <inkml:brushProperty name="tip" value="rectangle"/>
+      <inkml:brushProperty name="rasterOp" value="maskPen"/>
+    </inkml:brush>
+  </inkml:definitions>
+  <inkml:trace contextRef="#ctx0" brushRef="#br0">0 3,'73'0,"-9"0,-30 0,-5 0,-5 0,-7 0,14 0,-11 0,16 0,-2-1,-1 1,4-2,-9 2,2 2,-7-2,-4 3,-3-2</inkml:trace>
+</inkml:ink>
+</file>
+
+<file path=ppt/ink/ink8.xml><?xml version="1.0" encoding="utf-8"?>
+<inkml:ink xmlns:inkml="http://www.w3.org/2003/InkML">
+  <inkml:definitions>
+    <inkml:context xml:id="ctx0">
+      <inkml:inkSource xml:id="inkSrc0">
+        <inkml:traceFormat>
+          <inkml:channel name="X" type="integer" min="-2.14748E9" max="2.14748E9" units="cm"/>
+          <inkml:channel name="Y" type="integer" min="-2.14748E9" max="2.14748E9" units="cm"/>
+        </inkml:traceFormat>
+        <inkml:channelProperties>
+          <inkml:channelProperty channel="X" name="resolution" value="1000" units="1/cm"/>
+          <inkml:channelProperty channel="Y" name="resolution" value="1000" units="1/cm"/>
+        </inkml:channelProperties>
+      </inkml:inkSource>
+      <inkml:timestamp xml:id="ts0" timeString="2026-05-19T07:52:43.729"/>
+    </inkml:context>
+    <inkml:brush xml:id="br0">
+      <inkml:brushProperty name="width" value="0.4" units="cm"/>
+      <inkml:brushProperty name="height" value="0.8" units="cm"/>
+      <inkml:brushProperty name="color" value="#FFACD5"/>
+      <inkml:brushProperty name="tip" value="rectangle"/>
+      <inkml:brushProperty name="rasterOp" value="maskPen"/>
+    </inkml:brush>
+  </inkml:definitions>
+  <inkml:trace contextRef="#ctx0" brushRef="#br0">1 2,'52'0,"-12"-1,-30 2,4-1,12 0,-3 0,24 1,-19 1,2 1,-14-2</inkml:trace>
+</inkml:ink>
+</file>
+
+<file path=ppt/ink/ink9.xml><?xml version="1.0" encoding="utf-8"?>
+<inkml:ink xmlns:inkml="http://www.w3.org/2003/InkML">
+  <inkml:definitions>
+    <inkml:context xml:id="ctx0">
+      <inkml:inkSource xml:id="inkSrc0">
+        <inkml:traceFormat>
+          <inkml:channel name="X" type="integer" min="-2.14748E9" max="2.14748E9" units="cm"/>
+          <inkml:channel name="Y" type="integer" min="-2.14748E9" max="2.14748E9" units="cm"/>
+        </inkml:traceFormat>
+        <inkml:channelProperties>
+          <inkml:channelProperty channel="X" name="resolution" value="1000" units="1/cm"/>
+          <inkml:channelProperty channel="Y" name="resolution" value="1000" units="1/cm"/>
+        </inkml:channelProperties>
+      </inkml:inkSource>
+      <inkml:timestamp xml:id="ts0" timeString="2026-05-19T07:52:51.639"/>
+    </inkml:context>
+    <inkml:brush xml:id="br0">
+      <inkml:brushProperty name="width" value="0.4" units="cm"/>
+      <inkml:brushProperty name="height" value="0.8" units="cm"/>
+      <inkml:brushProperty name="color" value="#FFACD5"/>
+      <inkml:brushProperty name="tip" value="rectangle"/>
+      <inkml:brushProperty name="rasterOp" value="maskPen"/>
+    </inkml:brush>
+  </inkml:definitions>
+  <inkml:trace contextRef="#ctx0" brushRef="#br0">0 0,'66'36,"-12"-5,-28-18,-11-5,14-3,-1-3,10-4,-3 0,-12-3,-6 3,13-3,-5 2,15-3,-18 5,-7-1,-11 2</inkml:trace>
 </inkml:ink>
 </file>
 
@@ -294,7 +1274,7 @@
           <a:p>
             <a:fld id="{15D8E939-9ECB-9C46-A248-99A4B8126363}" type="datetimeFigureOut">
               <a:rPr lang="en-JP" smtClean="0"/>
-              <a:t>2026/03/17</a:t>
+              <a:t>5/19/26</a:t>
             </a:fld>
             <a:endParaRPr lang="en-JP"/>
           </a:p>
@@ -581,7 +1561,7 @@
       </p:grpSpPr>
       <p:sp>
         <p:nvSpPr>
-          <p:cNvPr id="2" name="Slide Image Placeholder 1"/>
+          <p:cNvPr id="2" name="スライド イメージ プレースホルダー 1"/>
           <p:cNvSpPr>
             <a:spLocks noGrp="1" noRot="1" noChangeAspect="1"/>
           </p:cNvSpPr>
@@ -593,7 +1573,7 @@
       </p:sp>
       <p:sp>
         <p:nvSpPr>
-          <p:cNvPr id="3" name="Notes Placeholder 2"/>
+          <p:cNvPr id="3" name="ノート プレースホルダー 2"/>
           <p:cNvSpPr>
             <a:spLocks noGrp="1"/>
           </p:cNvSpPr>
@@ -606,13 +1586,13 @@
           <a:bodyPr/>
           <a:lstStyle/>
           <a:p>
-            <a:endParaRPr lang="en-JP" dirty="0"/>
+            <a:endParaRPr kumimoji="1" lang="ja-JP" altLang="en-US"/>
           </a:p>
         </p:txBody>
       </p:sp>
       <p:sp>
         <p:nvSpPr>
-          <p:cNvPr id="4" name="Slide Number Placeholder 3"/>
+          <p:cNvPr id="4" name="スライド番号プレースホルダー 3"/>
           <p:cNvSpPr>
             <a:spLocks noGrp="1"/>
           </p:cNvSpPr>
@@ -627,7 +1607,7 @@
           <a:p>
             <a:fld id="{E1222822-2BA0-D548-8268-B2F1F6F289DC}" type="slidenum">
               <a:rPr lang="en-JP" smtClean="0"/>
-              <a:t>26</a:t>
+              <a:t>1</a:t>
             </a:fld>
             <a:endParaRPr lang="en-JP"/>
           </a:p>
@@ -636,7 +1616,7 @@
     </p:spTree>
     <p:extLst>
       <p:ext uri="{BB962C8B-B14F-4D97-AF65-F5344CB8AC3E}">
-        <p14:creationId xmlns:p14="http://schemas.microsoft.com/office/powerpoint/2010/main" val="1327102837"/>
+        <p14:creationId xmlns:p14="http://schemas.microsoft.com/office/powerpoint/2010/main" val="1640239183"/>
       </p:ext>
     </p:extLst>
   </p:cSld>
@@ -711,6 +1691,90 @@
           <a:p>
             <a:fld id="{E1222822-2BA0-D548-8268-B2F1F6F289DC}" type="slidenum">
               <a:rPr lang="en-JP" smtClean="0"/>
+              <a:t>26</a:t>
+            </a:fld>
+            <a:endParaRPr lang="en-JP"/>
+          </a:p>
+        </p:txBody>
+      </p:sp>
+    </p:spTree>
+    <p:extLst>
+      <p:ext uri="{BB962C8B-B14F-4D97-AF65-F5344CB8AC3E}">
+        <p14:creationId xmlns:p14="http://schemas.microsoft.com/office/powerpoint/2010/main" val="1327102837"/>
+      </p:ext>
+    </p:extLst>
+  </p:cSld>
+  <p:clrMapOvr>
+    <a:masterClrMapping/>
+  </p:clrMapOvr>
+</p:notes>
+</file>
+
+<file path=ppt/notesSlides/notesSlide3.xml><?xml version="1.0" encoding="utf-8"?>
+<p:notes xmlns:a="http://schemas.openxmlformats.org/drawingml/2006/main" xmlns:r="http://schemas.openxmlformats.org/officeDocument/2006/relationships" xmlns:p="http://schemas.openxmlformats.org/presentationml/2006/main">
+  <p:cSld>
+    <p:spTree>
+      <p:nvGrpSpPr>
+        <p:cNvPr id="1" name=""/>
+        <p:cNvGrpSpPr/>
+        <p:nvPr/>
+      </p:nvGrpSpPr>
+      <p:grpSpPr>
+        <a:xfrm>
+          <a:off x="0" y="0"/>
+          <a:ext cx="0" cy="0"/>
+          <a:chOff x="0" y="0"/>
+          <a:chExt cx="0" cy="0"/>
+        </a:xfrm>
+      </p:grpSpPr>
+      <p:sp>
+        <p:nvSpPr>
+          <p:cNvPr id="2" name="Slide Image Placeholder 1"/>
+          <p:cNvSpPr>
+            <a:spLocks noGrp="1" noRot="1" noChangeAspect="1"/>
+          </p:cNvSpPr>
+          <p:nvPr>
+            <p:ph type="sldImg"/>
+          </p:nvPr>
+        </p:nvSpPr>
+        <p:spPr/>
+      </p:sp>
+      <p:sp>
+        <p:nvSpPr>
+          <p:cNvPr id="3" name="Notes Placeholder 2"/>
+          <p:cNvSpPr>
+            <a:spLocks noGrp="1"/>
+          </p:cNvSpPr>
+          <p:nvPr>
+            <p:ph type="body" idx="1"/>
+          </p:nvPr>
+        </p:nvSpPr>
+        <p:spPr/>
+        <p:txBody>
+          <a:bodyPr/>
+          <a:lstStyle/>
+          <a:p>
+            <a:endParaRPr lang="en-JP" dirty="0"/>
+          </a:p>
+        </p:txBody>
+      </p:sp>
+      <p:sp>
+        <p:nvSpPr>
+          <p:cNvPr id="4" name="Slide Number Placeholder 3"/>
+          <p:cNvSpPr>
+            <a:spLocks noGrp="1"/>
+          </p:cNvSpPr>
+          <p:nvPr>
+            <p:ph type="sldNum" sz="quarter" idx="5"/>
+          </p:nvPr>
+        </p:nvSpPr>
+        <p:spPr/>
+        <p:txBody>
+          <a:bodyPr/>
+          <a:lstStyle/>
+          <a:p>
+            <a:fld id="{E1222822-2BA0-D548-8268-B2F1F6F289DC}" type="slidenum">
+              <a:rPr lang="en-JP" smtClean="0"/>
               <a:t>27</a:t>
             </a:fld>
             <a:endParaRPr lang="en-JP"/>
@@ -730,7 +1794,7 @@
 </p:notes>
 </file>
 
-<file path=ppt/notesSlides/notesSlide3.xml><?xml version="1.0" encoding="utf-8"?>
+<file path=ppt/notesSlides/notesSlide4.xml><?xml version="1.0" encoding="utf-8"?>
 <p:notes xmlns:a="http://schemas.openxmlformats.org/drawingml/2006/main" xmlns:r="http://schemas.openxmlformats.org/officeDocument/2006/relationships" xmlns:p="http://schemas.openxmlformats.org/presentationml/2006/main">
   <p:cSld>
     <p:spTree>
@@ -963,7 +2027,7 @@
           <a:p>
             <a:fld id="{B305A450-B214-F843-90D3-43D45AB970BF}" type="datetime1">
               <a:rPr lang="en-US" smtClean="0"/>
-              <a:t>3/17/26</a:t>
+              <a:t>5/19/26</a:t>
             </a:fld>
             <a:endParaRPr lang="en-JP"/>
           </a:p>
@@ -1163,7 +2227,7 @@
           <a:p>
             <a:fld id="{3FE6076C-7478-7547-8EE6-BBCC8E0F5965}" type="datetime1">
               <a:rPr lang="en-US" smtClean="0"/>
-              <a:t>3/17/26</a:t>
+              <a:t>5/19/26</a:t>
             </a:fld>
             <a:endParaRPr lang="en-JP"/>
           </a:p>
@@ -1373,7 +2437,7 @@
           <a:p>
             <a:fld id="{9ACD9DBC-B76F-1F49-9ACB-B3C63B260788}" type="datetime1">
               <a:rPr lang="en-US" smtClean="0"/>
-              <a:t>3/17/26</a:t>
+              <a:t>5/19/26</a:t>
             </a:fld>
             <a:endParaRPr lang="en-JP"/>
           </a:p>
@@ -1573,7 +2637,7 @@
           <a:p>
             <a:fld id="{97256E53-50F3-8B41-827D-E71E7A78D7C8}" type="datetime1">
               <a:rPr lang="en-US" smtClean="0"/>
-              <a:t>3/17/26</a:t>
+              <a:t>5/19/26</a:t>
             </a:fld>
             <a:endParaRPr lang="en-JP"/>
           </a:p>
@@ -1849,7 +2913,7 @@
           <a:p>
             <a:fld id="{60AD3F61-4B41-B048-9345-533AA47C1AFA}" type="datetime1">
               <a:rPr lang="en-US" smtClean="0"/>
-              <a:t>3/17/26</a:t>
+              <a:t>5/19/26</a:t>
             </a:fld>
             <a:endParaRPr lang="en-JP"/>
           </a:p>
@@ -2117,7 +3181,7 @@
           <a:p>
             <a:fld id="{9E0C3DDA-75D5-FE45-B27F-09B23348A3CF}" type="datetime1">
               <a:rPr lang="en-US" smtClean="0"/>
-              <a:t>3/17/26</a:t>
+              <a:t>5/19/26</a:t>
             </a:fld>
             <a:endParaRPr lang="en-JP"/>
           </a:p>
@@ -2532,7 +3596,7 @@
           <a:p>
             <a:fld id="{91B16E66-205B-D348-AF09-8C13DA8BDFF9}" type="datetime1">
               <a:rPr lang="en-US" smtClean="0"/>
-              <a:t>3/17/26</a:t>
+              <a:t>5/19/26</a:t>
             </a:fld>
             <a:endParaRPr lang="en-JP"/>
           </a:p>
@@ -2674,7 +3738,7 @@
           <a:p>
             <a:fld id="{222CE9F2-560E-4648-82A4-0C4186C23AAC}" type="datetime1">
               <a:rPr lang="en-US" smtClean="0"/>
-              <a:t>3/17/26</a:t>
+              <a:t>5/19/26</a:t>
             </a:fld>
             <a:endParaRPr lang="en-JP"/>
           </a:p>
@@ -2787,7 +3851,7 @@
           <a:p>
             <a:fld id="{2914F908-ED62-3949-B616-21C7C363772F}" type="datetime1">
               <a:rPr lang="en-US" smtClean="0"/>
-              <a:t>3/17/26</a:t>
+              <a:t>5/19/26</a:t>
             </a:fld>
             <a:endParaRPr lang="en-JP"/>
           </a:p>
@@ -3100,7 +4164,7 @@
           <a:p>
             <a:fld id="{8280A505-8893-D540-9413-F8B9ED1E178A}" type="datetime1">
               <a:rPr lang="en-US" smtClean="0"/>
-              <a:t>3/17/26</a:t>
+              <a:t>5/19/26</a:t>
             </a:fld>
             <a:endParaRPr lang="en-JP"/>
           </a:p>
@@ -3389,7 +4453,7 @@
           <a:p>
             <a:fld id="{40CD7CE6-B77F-5744-9AB9-6E4139649818}" type="datetime1">
               <a:rPr lang="en-US" smtClean="0"/>
-              <a:t>3/17/26</a:t>
+              <a:t>5/19/26</a:t>
             </a:fld>
             <a:endParaRPr lang="en-JP"/>
           </a:p>
@@ -3632,7 +4696,7 @@
           <a:p>
             <a:fld id="{DC28B759-A9A1-7B41-B30F-900953345635}" type="datetime1">
               <a:rPr lang="en-US" smtClean="0"/>
-              <a:t>3/17/26</a:t>
+              <a:t>5/19/26</a:t>
             </a:fld>
             <a:endParaRPr lang="en-JP"/>
           </a:p>
@@ -7448,6 +8512,51 @@
           </a:prstGeom>
         </p:spPr>
       </p:pic>
+      <p:sp>
+        <p:nvSpPr>
+          <p:cNvPr id="2" name="円/楕円 1">
+            <a:extLst>
+              <a:ext uri="{FF2B5EF4-FFF2-40B4-BE49-F238E27FC236}">
+                <a16:creationId xmlns:a16="http://schemas.microsoft.com/office/drawing/2014/main" id="{10737A95-ED44-5513-D17C-0A9C1A650302}"/>
+              </a:ext>
+            </a:extLst>
+          </p:cNvPr>
+          <p:cNvSpPr/>
+          <p:nvPr/>
+        </p:nvSpPr>
+        <p:spPr>
+          <a:xfrm>
+            <a:off x="914400" y="1253067"/>
+            <a:ext cx="2489200" cy="1947333"/>
+          </a:xfrm>
+          <a:prstGeom prst="ellipse">
+            <a:avLst/>
+          </a:prstGeom>
+          <a:noFill/>
+        </p:spPr>
+        <p:style>
+          <a:lnRef idx="2">
+            <a:schemeClr val="accent6"/>
+          </a:lnRef>
+          <a:fillRef idx="1">
+            <a:schemeClr val="lt1"/>
+          </a:fillRef>
+          <a:effectRef idx="0">
+            <a:schemeClr val="accent6"/>
+          </a:effectRef>
+          <a:fontRef idx="minor">
+            <a:schemeClr val="dk1"/>
+          </a:fontRef>
+        </p:style>
+        <p:txBody>
+          <a:bodyPr rtlCol="0" anchor="ctr"/>
+          <a:lstStyle/>
+          <a:p>
+            <a:pPr algn="ctr"/>
+            <a:endParaRPr kumimoji="1" lang="ja-JP" altLang="en-US"/>
+          </a:p>
+        </p:txBody>
+      </p:sp>
     </p:spTree>
     <p:extLst>
       <p:ext uri="{BB962C8B-B14F-4D97-AF65-F5344CB8AC3E}">
@@ -8466,6 +9575,57 @@
           </a:p>
         </p:txBody>
       </p:sp>
+      <mc:AlternateContent xmlns:mc="http://schemas.openxmlformats.org/markup-compatibility/2006">
+        <mc:Choice xmlns:p14="http://schemas.microsoft.com/office/powerpoint/2010/main" Requires="p14">
+          <p:contentPart p14:bwMode="auto" r:id="rId39">
+            <p14:nvContentPartPr>
+              <p14:cNvPr id="3" name="インク 2">
+                <a:extLst>
+                  <a:ext uri="{FF2B5EF4-FFF2-40B4-BE49-F238E27FC236}">
+                    <a16:creationId xmlns:a16="http://schemas.microsoft.com/office/drawing/2014/main" id="{3E4895B6-521B-BB57-A8C3-A7CC13F976D4}"/>
+                  </a:ext>
+                </a:extLst>
+              </p14:cNvPr>
+              <p14:cNvContentPartPr/>
+              <p14:nvPr/>
+            </p14:nvContentPartPr>
+            <p14:xfrm>
+              <a:off x="5688940" y="3938943"/>
+              <a:ext cx="225720" cy="5760"/>
+            </p14:xfrm>
+          </p:contentPart>
+        </mc:Choice>
+        <mc:Fallback>
+          <p:pic>
+            <p:nvPicPr>
+              <p:cNvPr id="3" name="インク 2">
+                <a:extLst>
+                  <a:ext uri="{FF2B5EF4-FFF2-40B4-BE49-F238E27FC236}">
+                    <a16:creationId xmlns:a16="http://schemas.microsoft.com/office/drawing/2014/main" id="{3E4895B6-521B-BB57-A8C3-A7CC13F976D4}"/>
+                  </a:ext>
+                </a:extLst>
+              </p:cNvPr>
+              <p:cNvPicPr/>
+              <p:nvPr/>
+            </p:nvPicPr>
+            <p:blipFill>
+              <a:blip r:embed="rId40"/>
+              <a:stretch>
+                <a:fillRect/>
+              </a:stretch>
+            </p:blipFill>
+            <p:spPr>
+              <a:xfrm>
+                <a:off x="5617300" y="3795303"/>
+                <a:ext cx="369360" cy="293400"/>
+              </a:xfrm>
+              <a:prstGeom prst="rect">
+                <a:avLst/>
+              </a:prstGeom>
+            </p:spPr>
+          </p:pic>
+        </mc:Fallback>
+      </mc:AlternateContent>
     </p:spTree>
     <p:extLst>
       <p:ext uri="{BB962C8B-B14F-4D97-AF65-F5344CB8AC3E}">
@@ -8884,6 +10044,108 @@
           </a:p>
         </p:txBody>
       </p:sp>
+      <mc:AlternateContent xmlns:mc="http://schemas.openxmlformats.org/markup-compatibility/2006">
+        <mc:Choice xmlns:p14="http://schemas.microsoft.com/office/powerpoint/2010/main" Requires="p14">
+          <p:contentPart p14:bwMode="auto" r:id="rId2">
+            <p14:nvContentPartPr>
+              <p14:cNvPr id="5" name="インク 4">
+                <a:extLst>
+                  <a:ext uri="{FF2B5EF4-FFF2-40B4-BE49-F238E27FC236}">
+                    <a16:creationId xmlns:a16="http://schemas.microsoft.com/office/drawing/2014/main" id="{436A49E2-6179-77E2-2EEF-BC03FFBE2C2B}"/>
+                  </a:ext>
+                </a:extLst>
+              </p14:cNvPr>
+              <p14:cNvContentPartPr/>
+              <p14:nvPr/>
+            </p14:nvContentPartPr>
+            <p14:xfrm>
+              <a:off x="5606833" y="4486245"/>
+              <a:ext cx="2458080" cy="31680"/>
+            </p14:xfrm>
+          </p:contentPart>
+        </mc:Choice>
+        <mc:Fallback>
+          <p:pic>
+            <p:nvPicPr>
+              <p:cNvPr id="5" name="インク 4">
+                <a:extLst>
+                  <a:ext uri="{FF2B5EF4-FFF2-40B4-BE49-F238E27FC236}">
+                    <a16:creationId xmlns:a16="http://schemas.microsoft.com/office/drawing/2014/main" id="{436A49E2-6179-77E2-2EEF-BC03FFBE2C2B}"/>
+                  </a:ext>
+                </a:extLst>
+              </p:cNvPr>
+              <p:cNvPicPr/>
+              <p:nvPr/>
+            </p:nvPicPr>
+            <p:blipFill>
+              <a:blip r:embed="rId3"/>
+              <a:stretch>
+                <a:fillRect/>
+              </a:stretch>
+            </p:blipFill>
+            <p:spPr>
+              <a:xfrm>
+                <a:off x="5535193" y="4342245"/>
+                <a:ext cx="2601720" cy="319320"/>
+              </a:xfrm>
+              <a:prstGeom prst="rect">
+                <a:avLst/>
+              </a:prstGeom>
+            </p:spPr>
+          </p:pic>
+        </mc:Fallback>
+      </mc:AlternateContent>
+      <mc:AlternateContent xmlns:mc="http://schemas.openxmlformats.org/markup-compatibility/2006">
+        <mc:Choice xmlns:p14="http://schemas.microsoft.com/office/powerpoint/2010/main" Requires="p14">
+          <p:contentPart p14:bwMode="auto" r:id="rId4">
+            <p14:nvContentPartPr>
+              <p14:cNvPr id="6" name="インク 5">
+                <a:extLst>
+                  <a:ext uri="{FF2B5EF4-FFF2-40B4-BE49-F238E27FC236}">
+                    <a16:creationId xmlns:a16="http://schemas.microsoft.com/office/drawing/2014/main" id="{CFA330E9-4B35-CA2E-F87B-F37165B95D18}"/>
+                  </a:ext>
+                </a:extLst>
+              </p14:cNvPr>
+              <p14:cNvContentPartPr/>
+              <p14:nvPr/>
+            </p14:nvContentPartPr>
+            <p14:xfrm>
+              <a:off x="6436273" y="4878285"/>
+              <a:ext cx="1849680" cy="12240"/>
+            </p14:xfrm>
+          </p:contentPart>
+        </mc:Choice>
+        <mc:Fallback>
+          <p:pic>
+            <p:nvPicPr>
+              <p:cNvPr id="6" name="インク 5">
+                <a:extLst>
+                  <a:ext uri="{FF2B5EF4-FFF2-40B4-BE49-F238E27FC236}">
+                    <a16:creationId xmlns:a16="http://schemas.microsoft.com/office/drawing/2014/main" id="{CFA330E9-4B35-CA2E-F87B-F37165B95D18}"/>
+                  </a:ext>
+                </a:extLst>
+              </p:cNvPr>
+              <p:cNvPicPr/>
+              <p:nvPr/>
+            </p:nvPicPr>
+            <p:blipFill>
+              <a:blip r:embed="rId5"/>
+              <a:stretch>
+                <a:fillRect/>
+              </a:stretch>
+            </p:blipFill>
+            <p:spPr>
+              <a:xfrm>
+                <a:off x="6364633" y="4734645"/>
+                <a:ext cx="1993320" cy="299880"/>
+              </a:xfrm>
+              <a:prstGeom prst="rect">
+                <a:avLst/>
+              </a:prstGeom>
+            </p:spPr>
+          </p:pic>
+        </mc:Fallback>
+      </mc:AlternateContent>
     </p:spTree>
     <p:extLst>
       <p:ext uri="{BB962C8B-B14F-4D97-AF65-F5344CB8AC3E}">
@@ -9302,6 +10564,57 @@
           </a:p>
         </p:txBody>
       </p:sp>
+      <mc:AlternateContent xmlns:mc="http://schemas.openxmlformats.org/markup-compatibility/2006">
+        <mc:Choice xmlns:p14="http://schemas.microsoft.com/office/powerpoint/2010/main" Requires="p14">
+          <p:contentPart p14:bwMode="auto" r:id="rId2">
+            <p14:nvContentPartPr>
+              <p14:cNvPr id="5" name="インク 4">
+                <a:extLst>
+                  <a:ext uri="{FF2B5EF4-FFF2-40B4-BE49-F238E27FC236}">
+                    <a16:creationId xmlns:a16="http://schemas.microsoft.com/office/drawing/2014/main" id="{E8A90825-3879-FE57-3B80-A7C51075CF43}"/>
+                  </a:ext>
+                </a:extLst>
+              </p14:cNvPr>
+              <p14:cNvContentPartPr/>
+              <p14:nvPr/>
+            </p14:nvContentPartPr>
+            <p14:xfrm>
+              <a:off x="5339740" y="4436565"/>
+              <a:ext cx="2530800" cy="48600"/>
+            </p14:xfrm>
+          </p:contentPart>
+        </mc:Choice>
+        <mc:Fallback>
+          <p:pic>
+            <p:nvPicPr>
+              <p:cNvPr id="5" name="インク 4">
+                <a:extLst>
+                  <a:ext uri="{FF2B5EF4-FFF2-40B4-BE49-F238E27FC236}">
+                    <a16:creationId xmlns:a16="http://schemas.microsoft.com/office/drawing/2014/main" id="{E8A90825-3879-FE57-3B80-A7C51075CF43}"/>
+                  </a:ext>
+                </a:extLst>
+              </p:cNvPr>
+              <p:cNvPicPr/>
+              <p:nvPr/>
+            </p:nvPicPr>
+            <p:blipFill>
+              <a:blip r:embed="rId3"/>
+              <a:stretch>
+                <a:fillRect/>
+              </a:stretch>
+            </p:blipFill>
+            <p:spPr>
+              <a:xfrm>
+                <a:off x="5267740" y="4292925"/>
+                <a:ext cx="2674440" cy="336240"/>
+              </a:xfrm>
+              <a:prstGeom prst="rect">
+                <a:avLst/>
+              </a:prstGeom>
+            </p:spPr>
+          </p:pic>
+        </mc:Fallback>
+      </mc:AlternateContent>
     </p:spTree>
     <p:extLst>
       <p:ext uri="{BB962C8B-B14F-4D97-AF65-F5344CB8AC3E}">
@@ -9931,6 +11244,108 @@
           </a:p>
         </p:txBody>
       </p:sp>
+      <mc:AlternateContent xmlns:mc="http://schemas.openxmlformats.org/markup-compatibility/2006">
+        <mc:Choice xmlns:p14="http://schemas.microsoft.com/office/powerpoint/2010/main" Requires="p14">
+          <p:contentPart p14:bwMode="auto" r:id="rId2">
+            <p14:nvContentPartPr>
+              <p14:cNvPr id="5" name="インク 4">
+                <a:extLst>
+                  <a:ext uri="{FF2B5EF4-FFF2-40B4-BE49-F238E27FC236}">
+                    <a16:creationId xmlns:a16="http://schemas.microsoft.com/office/drawing/2014/main" id="{B79EDD77-5951-9C9C-45B3-1CA73D321DAF}"/>
+                  </a:ext>
+                </a:extLst>
+              </p14:cNvPr>
+              <p14:cNvContentPartPr/>
+              <p14:nvPr/>
+            </p14:nvContentPartPr>
+            <p14:xfrm>
+              <a:off x="2984980" y="1964445"/>
+              <a:ext cx="1992960" cy="62280"/>
+            </p14:xfrm>
+          </p:contentPart>
+        </mc:Choice>
+        <mc:Fallback>
+          <p:pic>
+            <p:nvPicPr>
+              <p:cNvPr id="5" name="インク 4">
+                <a:extLst>
+                  <a:ext uri="{FF2B5EF4-FFF2-40B4-BE49-F238E27FC236}">
+                    <a16:creationId xmlns:a16="http://schemas.microsoft.com/office/drawing/2014/main" id="{B79EDD77-5951-9C9C-45B3-1CA73D321DAF}"/>
+                  </a:ext>
+                </a:extLst>
+              </p:cNvPr>
+              <p:cNvPicPr/>
+              <p:nvPr/>
+            </p:nvPicPr>
+            <p:blipFill>
+              <a:blip r:embed="rId3"/>
+              <a:stretch>
+                <a:fillRect/>
+              </a:stretch>
+            </p:blipFill>
+            <p:spPr>
+              <a:xfrm>
+                <a:off x="2912980" y="1820805"/>
+                <a:ext cx="2136600" cy="349920"/>
+              </a:xfrm>
+              <a:prstGeom prst="rect">
+                <a:avLst/>
+              </a:prstGeom>
+            </p:spPr>
+          </p:pic>
+        </mc:Fallback>
+      </mc:AlternateContent>
+      <mc:AlternateContent xmlns:mc="http://schemas.openxmlformats.org/markup-compatibility/2006">
+        <mc:Choice xmlns:p14="http://schemas.microsoft.com/office/powerpoint/2010/main" Requires="p14">
+          <p:contentPart p14:bwMode="auto" r:id="rId4">
+            <p14:nvContentPartPr>
+              <p14:cNvPr id="6" name="インク 5">
+                <a:extLst>
+                  <a:ext uri="{FF2B5EF4-FFF2-40B4-BE49-F238E27FC236}">
+                    <a16:creationId xmlns:a16="http://schemas.microsoft.com/office/drawing/2014/main" id="{41039649-1699-0E3E-D7C0-A042B896A2D6}"/>
+                  </a:ext>
+                </a:extLst>
+              </p14:cNvPr>
+              <p14:cNvContentPartPr/>
+              <p14:nvPr/>
+            </p14:nvContentPartPr>
+            <p14:xfrm>
+              <a:off x="2987500" y="2110245"/>
+              <a:ext cx="2001960" cy="37440"/>
+            </p14:xfrm>
+          </p:contentPart>
+        </mc:Choice>
+        <mc:Fallback>
+          <p:pic>
+            <p:nvPicPr>
+              <p:cNvPr id="6" name="インク 5">
+                <a:extLst>
+                  <a:ext uri="{FF2B5EF4-FFF2-40B4-BE49-F238E27FC236}">
+                    <a16:creationId xmlns:a16="http://schemas.microsoft.com/office/drawing/2014/main" id="{41039649-1699-0E3E-D7C0-A042B896A2D6}"/>
+                  </a:ext>
+                </a:extLst>
+              </p:cNvPr>
+              <p:cNvPicPr/>
+              <p:nvPr/>
+            </p:nvPicPr>
+            <p:blipFill>
+              <a:blip r:embed="rId5"/>
+              <a:stretch>
+                <a:fillRect/>
+              </a:stretch>
+            </p:blipFill>
+            <p:spPr>
+              <a:xfrm>
+                <a:off x="2915860" y="1966605"/>
+                <a:ext cx="2145600" cy="325080"/>
+              </a:xfrm>
+              <a:prstGeom prst="rect">
+                <a:avLst/>
+              </a:prstGeom>
+            </p:spPr>
+          </p:pic>
+        </mc:Fallback>
+      </mc:AlternateContent>
     </p:spTree>
     <p:extLst>
       <p:ext uri="{BB962C8B-B14F-4D97-AF65-F5344CB8AC3E}">
@@ -10519,6 +11934,312 @@
           </a:p>
         </p:txBody>
       </p:sp>
+      <mc:AlternateContent xmlns:mc="http://schemas.openxmlformats.org/markup-compatibility/2006">
+        <mc:Choice xmlns:p14="http://schemas.microsoft.com/office/powerpoint/2010/main" Requires="p14">
+          <p:contentPart p14:bwMode="auto" r:id="rId4">
+            <p14:nvContentPartPr>
+              <p14:cNvPr id="3" name="インク 2">
+                <a:extLst>
+                  <a:ext uri="{FF2B5EF4-FFF2-40B4-BE49-F238E27FC236}">
+                    <a16:creationId xmlns:a16="http://schemas.microsoft.com/office/drawing/2014/main" id="{FDC61F58-ED01-EE6C-5366-80721F729C43}"/>
+                  </a:ext>
+                </a:extLst>
+              </p14:cNvPr>
+              <p14:cNvContentPartPr/>
+              <p14:nvPr/>
+            </p14:nvContentPartPr>
+            <p14:xfrm>
+              <a:off x="1881580" y="3658245"/>
+              <a:ext cx="197280" cy="2160"/>
+            </p14:xfrm>
+          </p:contentPart>
+        </mc:Choice>
+        <mc:Fallback>
+          <p:pic>
+            <p:nvPicPr>
+              <p:cNvPr id="3" name="インク 2">
+                <a:extLst>
+                  <a:ext uri="{FF2B5EF4-FFF2-40B4-BE49-F238E27FC236}">
+                    <a16:creationId xmlns:a16="http://schemas.microsoft.com/office/drawing/2014/main" id="{FDC61F58-ED01-EE6C-5366-80721F729C43}"/>
+                  </a:ext>
+                </a:extLst>
+              </p:cNvPr>
+              <p:cNvPicPr/>
+              <p:nvPr/>
+            </p:nvPicPr>
+            <p:blipFill>
+              <a:blip r:embed="rId5"/>
+              <a:stretch>
+                <a:fillRect/>
+              </a:stretch>
+            </p:blipFill>
+            <p:spPr>
+              <a:xfrm>
+                <a:off x="1809580" y="3514245"/>
+                <a:ext cx="340920" cy="289800"/>
+              </a:xfrm>
+              <a:prstGeom prst="rect">
+                <a:avLst/>
+              </a:prstGeom>
+            </p:spPr>
+          </p:pic>
+        </mc:Fallback>
+      </mc:AlternateContent>
+      <mc:AlternateContent xmlns:mc="http://schemas.openxmlformats.org/markup-compatibility/2006">
+        <mc:Choice xmlns:p14="http://schemas.microsoft.com/office/powerpoint/2010/main" Requires="p14">
+          <p:contentPart p14:bwMode="auto" r:id="rId6">
+            <p14:nvContentPartPr>
+              <p14:cNvPr id="6" name="インク 5">
+                <a:extLst>
+                  <a:ext uri="{FF2B5EF4-FFF2-40B4-BE49-F238E27FC236}">
+                    <a16:creationId xmlns:a16="http://schemas.microsoft.com/office/drawing/2014/main" id="{6C1952C1-DE4B-DD4C-BE13-FB1F87C31BBF}"/>
+                  </a:ext>
+                </a:extLst>
+              </p14:cNvPr>
+              <p14:cNvContentPartPr/>
+              <p14:nvPr/>
+            </p14:nvContentPartPr>
+            <p14:xfrm>
+              <a:off x="4506754" y="5613405"/>
+              <a:ext cx="103320" cy="3600"/>
+            </p14:xfrm>
+          </p:contentPart>
+        </mc:Choice>
+        <mc:Fallback>
+          <p:pic>
+            <p:nvPicPr>
+              <p:cNvPr id="6" name="インク 5">
+                <a:extLst>
+                  <a:ext uri="{FF2B5EF4-FFF2-40B4-BE49-F238E27FC236}">
+                    <a16:creationId xmlns:a16="http://schemas.microsoft.com/office/drawing/2014/main" id="{6C1952C1-DE4B-DD4C-BE13-FB1F87C31BBF}"/>
+                  </a:ext>
+                </a:extLst>
+              </p:cNvPr>
+              <p:cNvPicPr/>
+              <p:nvPr/>
+            </p:nvPicPr>
+            <p:blipFill>
+              <a:blip r:embed="rId7"/>
+              <a:stretch>
+                <a:fillRect/>
+              </a:stretch>
+            </p:blipFill>
+            <p:spPr>
+              <a:xfrm>
+                <a:off x="4435114" y="5469765"/>
+                <a:ext cx="246960" cy="291240"/>
+              </a:xfrm>
+              <a:prstGeom prst="rect">
+                <a:avLst/>
+              </a:prstGeom>
+            </p:spPr>
+          </p:pic>
+        </mc:Fallback>
+      </mc:AlternateContent>
+      <mc:AlternateContent xmlns:mc="http://schemas.openxmlformats.org/markup-compatibility/2006">
+        <mc:Choice xmlns:p14="http://schemas.microsoft.com/office/powerpoint/2010/main" Requires="p14">
+          <p:contentPart p14:bwMode="auto" r:id="rId8">
+            <p14:nvContentPartPr>
+              <p14:cNvPr id="7" name="インク 6">
+                <a:extLst>
+                  <a:ext uri="{FF2B5EF4-FFF2-40B4-BE49-F238E27FC236}">
+                    <a16:creationId xmlns:a16="http://schemas.microsoft.com/office/drawing/2014/main" id="{59101E37-5BBE-2A5B-4DEC-BFC7E4DA4FEB}"/>
+                  </a:ext>
+                </a:extLst>
+              </p14:cNvPr>
+              <p14:cNvContentPartPr/>
+              <p14:nvPr/>
+            </p14:nvContentPartPr>
+            <p14:xfrm>
+              <a:off x="4120474" y="5574525"/>
+              <a:ext cx="168480" cy="34560"/>
+            </p14:xfrm>
+          </p:contentPart>
+        </mc:Choice>
+        <mc:Fallback>
+          <p:pic>
+            <p:nvPicPr>
+              <p:cNvPr id="7" name="インク 6">
+                <a:extLst>
+                  <a:ext uri="{FF2B5EF4-FFF2-40B4-BE49-F238E27FC236}">
+                    <a16:creationId xmlns:a16="http://schemas.microsoft.com/office/drawing/2014/main" id="{59101E37-5BBE-2A5B-4DEC-BFC7E4DA4FEB}"/>
+                  </a:ext>
+                </a:extLst>
+              </p:cNvPr>
+              <p:cNvPicPr/>
+              <p:nvPr/>
+            </p:nvPicPr>
+            <p:blipFill>
+              <a:blip r:embed="rId9"/>
+              <a:stretch>
+                <a:fillRect/>
+              </a:stretch>
+            </p:blipFill>
+            <p:spPr>
+              <a:xfrm>
+                <a:off x="4048474" y="5430525"/>
+                <a:ext cx="312120" cy="322200"/>
+              </a:xfrm>
+              <a:prstGeom prst="rect">
+                <a:avLst/>
+              </a:prstGeom>
+            </p:spPr>
+          </p:pic>
+        </mc:Fallback>
+      </mc:AlternateContent>
+      <mc:AlternateContent xmlns:mc="http://schemas.openxmlformats.org/markup-compatibility/2006">
+        <mc:Choice xmlns:p14="http://schemas.microsoft.com/office/powerpoint/2010/main" Requires="p14">
+          <p:contentPart p14:bwMode="auto" r:id="rId10">
+            <p14:nvContentPartPr>
+              <p14:cNvPr id="10" name="インク 9">
+                <a:extLst>
+                  <a:ext uri="{FF2B5EF4-FFF2-40B4-BE49-F238E27FC236}">
+                    <a16:creationId xmlns:a16="http://schemas.microsoft.com/office/drawing/2014/main" id="{E0D39DE2-91D0-6398-A4C8-B205721A83B1}"/>
+                  </a:ext>
+                </a:extLst>
+              </p14:cNvPr>
+              <p14:cNvContentPartPr/>
+              <p14:nvPr/>
+            </p14:nvContentPartPr>
+            <p14:xfrm>
+              <a:off x="4319914" y="5106885"/>
+              <a:ext cx="174960" cy="13320"/>
+            </p14:xfrm>
+          </p:contentPart>
+        </mc:Choice>
+        <mc:Fallback>
+          <p:pic>
+            <p:nvPicPr>
+              <p:cNvPr id="10" name="インク 9">
+                <a:extLst>
+                  <a:ext uri="{FF2B5EF4-FFF2-40B4-BE49-F238E27FC236}">
+                    <a16:creationId xmlns:a16="http://schemas.microsoft.com/office/drawing/2014/main" id="{E0D39DE2-91D0-6398-A4C8-B205721A83B1}"/>
+                  </a:ext>
+                </a:extLst>
+              </p:cNvPr>
+              <p:cNvPicPr/>
+              <p:nvPr/>
+            </p:nvPicPr>
+            <p:blipFill>
+              <a:blip r:embed="rId11"/>
+              <a:stretch>
+                <a:fillRect/>
+              </a:stretch>
+            </p:blipFill>
+            <p:spPr>
+              <a:xfrm>
+                <a:off x="4248274" y="4962885"/>
+                <a:ext cx="318600" cy="300960"/>
+              </a:xfrm>
+              <a:prstGeom prst="rect">
+                <a:avLst/>
+              </a:prstGeom>
+            </p:spPr>
+          </p:pic>
+        </mc:Fallback>
+      </mc:AlternateContent>
+      <mc:AlternateContent xmlns:mc="http://schemas.openxmlformats.org/markup-compatibility/2006">
+        <mc:Choice xmlns:p14="http://schemas.microsoft.com/office/powerpoint/2010/main" Requires="p14">
+          <p:contentPart p14:bwMode="auto" r:id="rId12">
+            <p14:nvContentPartPr>
+              <p14:cNvPr id="11" name="インク 10">
+                <a:extLst>
+                  <a:ext uri="{FF2B5EF4-FFF2-40B4-BE49-F238E27FC236}">
+                    <a16:creationId xmlns:a16="http://schemas.microsoft.com/office/drawing/2014/main" id="{469B2E65-97A1-2FEF-9439-F08A29274A64}"/>
+                  </a:ext>
+                </a:extLst>
+              </p14:cNvPr>
+              <p14:cNvContentPartPr/>
+              <p14:nvPr/>
+            </p14:nvContentPartPr>
+            <p14:xfrm>
+              <a:off x="4197471" y="3829245"/>
+              <a:ext cx="351360" cy="6840"/>
+            </p14:xfrm>
+          </p:contentPart>
+        </mc:Choice>
+        <mc:Fallback>
+          <p:pic>
+            <p:nvPicPr>
+              <p:cNvPr id="11" name="インク 10">
+                <a:extLst>
+                  <a:ext uri="{FF2B5EF4-FFF2-40B4-BE49-F238E27FC236}">
+                    <a16:creationId xmlns:a16="http://schemas.microsoft.com/office/drawing/2014/main" id="{469B2E65-97A1-2FEF-9439-F08A29274A64}"/>
+                  </a:ext>
+                </a:extLst>
+              </p:cNvPr>
+              <p:cNvPicPr/>
+              <p:nvPr/>
+            </p:nvPicPr>
+            <p:blipFill>
+              <a:blip r:embed="rId13"/>
+              <a:stretch>
+                <a:fillRect/>
+              </a:stretch>
+            </p:blipFill>
+            <p:spPr>
+              <a:xfrm>
+                <a:off x="4125471" y="3685245"/>
+                <a:ext cx="495000" cy="294480"/>
+              </a:xfrm>
+              <a:prstGeom prst="rect">
+                <a:avLst/>
+              </a:prstGeom>
+            </p:spPr>
+          </p:pic>
+        </mc:Fallback>
+      </mc:AlternateContent>
+      <mc:AlternateContent xmlns:mc="http://schemas.openxmlformats.org/markup-compatibility/2006">
+        <mc:Choice xmlns:p14="http://schemas.microsoft.com/office/powerpoint/2010/main" Requires="p14">
+          <p:contentPart p14:bwMode="auto" r:id="rId14">
+            <p14:nvContentPartPr>
+              <p14:cNvPr id="12" name="インク 11">
+                <a:extLst>
+                  <a:ext uri="{FF2B5EF4-FFF2-40B4-BE49-F238E27FC236}">
+                    <a16:creationId xmlns:a16="http://schemas.microsoft.com/office/drawing/2014/main" id="{BEE1BE7C-2DFB-C27B-E160-4AE6F2041D34}"/>
+                  </a:ext>
+                </a:extLst>
+              </p14:cNvPr>
+              <p14:cNvContentPartPr/>
+              <p14:nvPr/>
+            </p14:nvContentPartPr>
+            <p14:xfrm>
+              <a:off x="4706151" y="2344965"/>
+              <a:ext cx="422280" cy="47160"/>
+            </p14:xfrm>
+          </p:contentPart>
+        </mc:Choice>
+        <mc:Fallback>
+          <p:pic>
+            <p:nvPicPr>
+              <p:cNvPr id="12" name="インク 11">
+                <a:extLst>
+                  <a:ext uri="{FF2B5EF4-FFF2-40B4-BE49-F238E27FC236}">
+                    <a16:creationId xmlns:a16="http://schemas.microsoft.com/office/drawing/2014/main" id="{BEE1BE7C-2DFB-C27B-E160-4AE6F2041D34}"/>
+                  </a:ext>
+                </a:extLst>
+              </p:cNvPr>
+              <p:cNvPicPr/>
+              <p:nvPr/>
+            </p:nvPicPr>
+            <p:blipFill>
+              <a:blip r:embed="rId15"/>
+              <a:stretch>
+                <a:fillRect/>
+              </a:stretch>
+            </p:blipFill>
+            <p:spPr>
+              <a:xfrm>
+                <a:off x="4634151" y="2201325"/>
+                <a:ext cx="565920" cy="334800"/>
+              </a:xfrm>
+              <a:prstGeom prst="rect">
+                <a:avLst/>
+              </a:prstGeom>
+            </p:spPr>
+          </p:pic>
+        </mc:Fallback>
+      </mc:AlternateContent>
     </p:spTree>
     <p:extLst>
       <p:ext uri="{BB962C8B-B14F-4D97-AF65-F5344CB8AC3E}">
@@ -11551,6 +13272,57 @@
           </p:pic>
         </mc:Fallback>
       </mc:AlternateContent>
+      <mc:AlternateContent xmlns:mc="http://schemas.openxmlformats.org/markup-compatibility/2006">
+        <mc:Choice xmlns:p14="http://schemas.microsoft.com/office/powerpoint/2010/main" Requires="p14">
+          <p:contentPart p14:bwMode="auto" r:id="rId21">
+            <p14:nvContentPartPr>
+              <p14:cNvPr id="3" name="インク 2">
+                <a:extLst>
+                  <a:ext uri="{FF2B5EF4-FFF2-40B4-BE49-F238E27FC236}">
+                    <a16:creationId xmlns:a16="http://schemas.microsoft.com/office/drawing/2014/main" id="{45F8490D-D7F2-589F-CD8B-1C9CA5A01D7A}"/>
+                  </a:ext>
+                </a:extLst>
+              </p14:cNvPr>
+              <p14:cNvContentPartPr/>
+              <p14:nvPr/>
+            </p14:nvContentPartPr>
+            <p14:xfrm>
+              <a:off x="7076031" y="3359805"/>
+              <a:ext cx="1164960" cy="12600"/>
+            </p14:xfrm>
+          </p:contentPart>
+        </mc:Choice>
+        <mc:Fallback>
+          <p:pic>
+            <p:nvPicPr>
+              <p:cNvPr id="3" name="インク 2">
+                <a:extLst>
+                  <a:ext uri="{FF2B5EF4-FFF2-40B4-BE49-F238E27FC236}">
+                    <a16:creationId xmlns:a16="http://schemas.microsoft.com/office/drawing/2014/main" id="{45F8490D-D7F2-589F-CD8B-1C9CA5A01D7A}"/>
+                  </a:ext>
+                </a:extLst>
+              </p:cNvPr>
+              <p:cNvPicPr/>
+              <p:nvPr/>
+            </p:nvPicPr>
+            <p:blipFill>
+              <a:blip r:embed="rId22"/>
+              <a:stretch>
+                <a:fillRect/>
+              </a:stretch>
+            </p:blipFill>
+            <p:spPr>
+              <a:xfrm>
+                <a:off x="7004391" y="3216165"/>
+                <a:ext cx="1308600" cy="300240"/>
+              </a:xfrm>
+              <a:prstGeom prst="rect">
+                <a:avLst/>
+              </a:prstGeom>
+            </p:spPr>
+          </p:pic>
+        </mc:Fallback>
+      </mc:AlternateContent>
     </p:spTree>
     <p:extLst>
       <p:ext uri="{BB962C8B-B14F-4D97-AF65-F5344CB8AC3E}">
@@ -11878,6 +13650,108 @@
           </a:p>
         </p:txBody>
       </p:sp>
+      <mc:AlternateContent xmlns:mc="http://schemas.openxmlformats.org/markup-compatibility/2006">
+        <mc:Choice xmlns:p14="http://schemas.microsoft.com/office/powerpoint/2010/main" Requires="p14">
+          <p:contentPart p14:bwMode="auto" r:id="rId2">
+            <p14:nvContentPartPr>
+              <p14:cNvPr id="5" name="インク 4">
+                <a:extLst>
+                  <a:ext uri="{FF2B5EF4-FFF2-40B4-BE49-F238E27FC236}">
+                    <a16:creationId xmlns:a16="http://schemas.microsoft.com/office/drawing/2014/main" id="{460BC866-8AD7-B1DE-3FD1-E7CA555732FF}"/>
+                  </a:ext>
+                </a:extLst>
+              </p14:cNvPr>
+              <p14:cNvContentPartPr/>
+              <p14:nvPr/>
+            </p14:nvContentPartPr>
+            <p14:xfrm>
+              <a:off x="3591059" y="3598125"/>
+              <a:ext cx="1992240" cy="43920"/>
+            </p14:xfrm>
+          </p:contentPart>
+        </mc:Choice>
+        <mc:Fallback>
+          <p:pic>
+            <p:nvPicPr>
+              <p:cNvPr id="5" name="インク 4">
+                <a:extLst>
+                  <a:ext uri="{FF2B5EF4-FFF2-40B4-BE49-F238E27FC236}">
+                    <a16:creationId xmlns:a16="http://schemas.microsoft.com/office/drawing/2014/main" id="{460BC866-8AD7-B1DE-3FD1-E7CA555732FF}"/>
+                  </a:ext>
+                </a:extLst>
+              </p:cNvPr>
+              <p:cNvPicPr/>
+              <p:nvPr/>
+            </p:nvPicPr>
+            <p:blipFill>
+              <a:blip r:embed="rId3"/>
+              <a:stretch>
+                <a:fillRect/>
+              </a:stretch>
+            </p:blipFill>
+            <p:spPr>
+              <a:xfrm>
+                <a:off x="3519419" y="3454485"/>
+                <a:ext cx="2135880" cy="331560"/>
+              </a:xfrm>
+              <a:prstGeom prst="rect">
+                <a:avLst/>
+              </a:prstGeom>
+            </p:spPr>
+          </p:pic>
+        </mc:Fallback>
+      </mc:AlternateContent>
+      <mc:AlternateContent xmlns:mc="http://schemas.openxmlformats.org/markup-compatibility/2006">
+        <mc:Choice xmlns:p14="http://schemas.microsoft.com/office/powerpoint/2010/main" Requires="p14">
+          <p:contentPart p14:bwMode="auto" r:id="rId4">
+            <p14:nvContentPartPr>
+              <p14:cNvPr id="6" name="インク 5">
+                <a:extLst>
+                  <a:ext uri="{FF2B5EF4-FFF2-40B4-BE49-F238E27FC236}">
+                    <a16:creationId xmlns:a16="http://schemas.microsoft.com/office/drawing/2014/main" id="{DA7C15FC-4768-8D1B-DF80-E6D448547DC1}"/>
+                  </a:ext>
+                </a:extLst>
+              </p14:cNvPr>
+              <p14:cNvContentPartPr/>
+              <p14:nvPr/>
+            </p14:nvContentPartPr>
+            <p14:xfrm>
+              <a:off x="6931139" y="4740045"/>
+              <a:ext cx="360" cy="360"/>
+            </p14:xfrm>
+          </p:contentPart>
+        </mc:Choice>
+        <mc:Fallback>
+          <p:pic>
+            <p:nvPicPr>
+              <p:cNvPr id="6" name="インク 5">
+                <a:extLst>
+                  <a:ext uri="{FF2B5EF4-FFF2-40B4-BE49-F238E27FC236}">
+                    <a16:creationId xmlns:a16="http://schemas.microsoft.com/office/drawing/2014/main" id="{DA7C15FC-4768-8D1B-DF80-E6D448547DC1}"/>
+                  </a:ext>
+                </a:extLst>
+              </p:cNvPr>
+              <p:cNvPicPr/>
+              <p:nvPr/>
+            </p:nvPicPr>
+            <p:blipFill>
+              <a:blip r:embed="rId5"/>
+              <a:stretch>
+                <a:fillRect/>
+              </a:stretch>
+            </p:blipFill>
+            <p:spPr>
+              <a:xfrm>
+                <a:off x="6859499" y="4596045"/>
+                <a:ext cx="144000" cy="288000"/>
+              </a:xfrm>
+              <a:prstGeom prst="rect">
+                <a:avLst/>
+              </a:prstGeom>
+            </p:spPr>
+          </p:pic>
+        </mc:Fallback>
+      </mc:AlternateContent>
     </p:spTree>
     <p:extLst>
       <p:ext uri="{BB962C8B-B14F-4D97-AF65-F5344CB8AC3E}">
@@ -12427,6 +14301,159 @@
           </a:p>
         </p:txBody>
       </p:sp>
+      <mc:AlternateContent xmlns:mc="http://schemas.openxmlformats.org/markup-compatibility/2006">
+        <mc:Choice xmlns:p14="http://schemas.microsoft.com/office/powerpoint/2010/main" Requires="p14">
+          <p:contentPart p14:bwMode="auto" r:id="rId3">
+            <p14:nvContentPartPr>
+              <p14:cNvPr id="2" name="インク 1">
+                <a:extLst>
+                  <a:ext uri="{FF2B5EF4-FFF2-40B4-BE49-F238E27FC236}">
+                    <a16:creationId xmlns:a16="http://schemas.microsoft.com/office/drawing/2014/main" id="{02AD994D-4C6E-2561-8B09-C40EF8D41F08}"/>
+                  </a:ext>
+                </a:extLst>
+              </p14:cNvPr>
+              <p14:cNvContentPartPr/>
+              <p14:nvPr/>
+            </p14:nvContentPartPr>
+            <p14:xfrm>
+              <a:off x="5573579" y="2061645"/>
+              <a:ext cx="2217600" cy="20160"/>
+            </p14:xfrm>
+          </p:contentPart>
+        </mc:Choice>
+        <mc:Fallback>
+          <p:pic>
+            <p:nvPicPr>
+              <p:cNvPr id="2" name="インク 1">
+                <a:extLst>
+                  <a:ext uri="{FF2B5EF4-FFF2-40B4-BE49-F238E27FC236}">
+                    <a16:creationId xmlns:a16="http://schemas.microsoft.com/office/drawing/2014/main" id="{02AD994D-4C6E-2561-8B09-C40EF8D41F08}"/>
+                  </a:ext>
+                </a:extLst>
+              </p:cNvPr>
+              <p:cNvPicPr/>
+              <p:nvPr/>
+            </p:nvPicPr>
+            <p:blipFill>
+              <a:blip r:embed="rId4"/>
+              <a:stretch>
+                <a:fillRect/>
+              </a:stretch>
+            </p:blipFill>
+            <p:spPr>
+              <a:xfrm>
+                <a:off x="5501579" y="1917645"/>
+                <a:ext cx="2361240" cy="307800"/>
+              </a:xfrm>
+              <a:prstGeom prst="rect">
+                <a:avLst/>
+              </a:prstGeom>
+            </p:spPr>
+          </p:pic>
+        </mc:Fallback>
+      </mc:AlternateContent>
+      <mc:AlternateContent xmlns:mc="http://schemas.openxmlformats.org/markup-compatibility/2006">
+        <mc:Choice xmlns:p14="http://schemas.microsoft.com/office/powerpoint/2010/main" Requires="p14">
+          <p:contentPart p14:bwMode="auto" r:id="rId5">
+            <p14:nvContentPartPr>
+              <p14:cNvPr id="3" name="インク 2">
+                <a:extLst>
+                  <a:ext uri="{FF2B5EF4-FFF2-40B4-BE49-F238E27FC236}">
+                    <a16:creationId xmlns:a16="http://schemas.microsoft.com/office/drawing/2014/main" id="{A026C307-6131-0DB8-A436-B8F6A40C5231}"/>
+                  </a:ext>
+                </a:extLst>
+              </p14:cNvPr>
+              <p14:cNvContentPartPr/>
+              <p14:nvPr/>
+            </p14:nvContentPartPr>
+            <p14:xfrm>
+              <a:off x="2530139" y="2969565"/>
+              <a:ext cx="2287440" cy="42840"/>
+            </p14:xfrm>
+          </p:contentPart>
+        </mc:Choice>
+        <mc:Fallback>
+          <p:pic>
+            <p:nvPicPr>
+              <p:cNvPr id="3" name="インク 2">
+                <a:extLst>
+                  <a:ext uri="{FF2B5EF4-FFF2-40B4-BE49-F238E27FC236}">
+                    <a16:creationId xmlns:a16="http://schemas.microsoft.com/office/drawing/2014/main" id="{A026C307-6131-0DB8-A436-B8F6A40C5231}"/>
+                  </a:ext>
+                </a:extLst>
+              </p:cNvPr>
+              <p:cNvPicPr/>
+              <p:nvPr/>
+            </p:nvPicPr>
+            <p:blipFill>
+              <a:blip r:embed="rId6"/>
+              <a:stretch>
+                <a:fillRect/>
+              </a:stretch>
+            </p:blipFill>
+            <p:spPr>
+              <a:xfrm>
+                <a:off x="2458499" y="2825565"/>
+                <a:ext cx="2431080" cy="330480"/>
+              </a:xfrm>
+              <a:prstGeom prst="rect">
+                <a:avLst/>
+              </a:prstGeom>
+            </p:spPr>
+          </p:pic>
+        </mc:Fallback>
+      </mc:AlternateContent>
+      <mc:AlternateContent xmlns:mc="http://schemas.openxmlformats.org/markup-compatibility/2006">
+        <mc:Choice xmlns:p14="http://schemas.microsoft.com/office/powerpoint/2010/main" Requires="p14">
+          <p:contentPart p14:bwMode="auto" r:id="rId7">
+            <p14:nvContentPartPr>
+              <p14:cNvPr id="7" name="インク 6">
+                <a:extLst>
+                  <a:ext uri="{FF2B5EF4-FFF2-40B4-BE49-F238E27FC236}">
+                    <a16:creationId xmlns:a16="http://schemas.microsoft.com/office/drawing/2014/main" id="{ED071416-AB0C-4C11-5E4D-038638E3B4C5}"/>
+                  </a:ext>
+                </a:extLst>
+              </p14:cNvPr>
+              <p14:cNvContentPartPr/>
+              <p14:nvPr/>
+            </p14:nvContentPartPr>
+            <p14:xfrm>
+              <a:off x="6764099" y="2978205"/>
+              <a:ext cx="1573200" cy="14760"/>
+            </p14:xfrm>
+          </p:contentPart>
+        </mc:Choice>
+        <mc:Fallback>
+          <p:pic>
+            <p:nvPicPr>
+              <p:cNvPr id="7" name="インク 6">
+                <a:extLst>
+                  <a:ext uri="{FF2B5EF4-FFF2-40B4-BE49-F238E27FC236}">
+                    <a16:creationId xmlns:a16="http://schemas.microsoft.com/office/drawing/2014/main" id="{ED071416-AB0C-4C11-5E4D-038638E3B4C5}"/>
+                  </a:ext>
+                </a:extLst>
+              </p:cNvPr>
+              <p:cNvPicPr/>
+              <p:nvPr/>
+            </p:nvPicPr>
+            <p:blipFill>
+              <a:blip r:embed="rId8"/>
+              <a:stretch>
+                <a:fillRect/>
+              </a:stretch>
+            </p:blipFill>
+            <p:spPr>
+              <a:xfrm>
+                <a:off x="6692459" y="2834565"/>
+                <a:ext cx="1716840" cy="302400"/>
+              </a:xfrm>
+              <a:prstGeom prst="rect">
+                <a:avLst/>
+              </a:prstGeom>
+            </p:spPr>
+          </p:pic>
+        </mc:Fallback>
+      </mc:AlternateContent>
     </p:spTree>
     <p:extLst>
       <p:ext uri="{BB962C8B-B14F-4D97-AF65-F5344CB8AC3E}">
@@ -13231,6 +15258,567 @@
           </a:p>
         </p:txBody>
       </p:sp>
+      <mc:AlternateContent xmlns:mc="http://schemas.openxmlformats.org/markup-compatibility/2006">
+        <mc:Choice xmlns:p14="http://schemas.microsoft.com/office/powerpoint/2010/main" Requires="p14">
+          <p:contentPart p14:bwMode="auto" r:id="rId3">
+            <p14:nvContentPartPr>
+              <p14:cNvPr id="7" name="インク 6">
+                <a:extLst>
+                  <a:ext uri="{FF2B5EF4-FFF2-40B4-BE49-F238E27FC236}">
+                    <a16:creationId xmlns:a16="http://schemas.microsoft.com/office/drawing/2014/main" id="{33A455F4-727A-D87B-C807-0F9AFF1E2C50}"/>
+                  </a:ext>
+                </a:extLst>
+              </p14:cNvPr>
+              <p14:cNvContentPartPr/>
+              <p14:nvPr/>
+            </p14:nvContentPartPr>
+            <p14:xfrm>
+              <a:off x="7250099" y="1949685"/>
+              <a:ext cx="2932920" cy="30600"/>
+            </p14:xfrm>
+          </p:contentPart>
+        </mc:Choice>
+        <mc:Fallback>
+          <p:pic>
+            <p:nvPicPr>
+              <p:cNvPr id="7" name="インク 6">
+                <a:extLst>
+                  <a:ext uri="{FF2B5EF4-FFF2-40B4-BE49-F238E27FC236}">
+                    <a16:creationId xmlns:a16="http://schemas.microsoft.com/office/drawing/2014/main" id="{33A455F4-727A-D87B-C807-0F9AFF1E2C50}"/>
+                  </a:ext>
+                </a:extLst>
+              </p:cNvPr>
+              <p:cNvPicPr/>
+              <p:nvPr/>
+            </p:nvPicPr>
+            <p:blipFill>
+              <a:blip r:embed="rId4"/>
+              <a:stretch>
+                <a:fillRect/>
+              </a:stretch>
+            </p:blipFill>
+            <p:spPr>
+              <a:xfrm>
+                <a:off x="7178099" y="1805685"/>
+                <a:ext cx="3076560" cy="318240"/>
+              </a:xfrm>
+              <a:prstGeom prst="rect">
+                <a:avLst/>
+              </a:prstGeom>
+            </p:spPr>
+          </p:pic>
+        </mc:Fallback>
+      </mc:AlternateContent>
+      <mc:AlternateContent xmlns:mc="http://schemas.openxmlformats.org/markup-compatibility/2006">
+        <mc:Choice xmlns:p14="http://schemas.microsoft.com/office/powerpoint/2010/main" Requires="p14">
+          <p:contentPart p14:bwMode="auto" r:id="rId5">
+            <p14:nvContentPartPr>
+              <p14:cNvPr id="8" name="インク 7">
+                <a:extLst>
+                  <a:ext uri="{FF2B5EF4-FFF2-40B4-BE49-F238E27FC236}">
+                    <a16:creationId xmlns:a16="http://schemas.microsoft.com/office/drawing/2014/main" id="{F52E42A9-C849-A957-2BEE-C0F0BD7C0F5C}"/>
+                  </a:ext>
+                </a:extLst>
+              </p14:cNvPr>
+              <p14:cNvContentPartPr/>
+              <p14:nvPr/>
+            </p14:nvContentPartPr>
+            <p14:xfrm>
+              <a:off x="2269139" y="5681805"/>
+              <a:ext cx="644040" cy="23400"/>
+            </p14:xfrm>
+          </p:contentPart>
+        </mc:Choice>
+        <mc:Fallback>
+          <p:pic>
+            <p:nvPicPr>
+              <p:cNvPr id="8" name="インク 7">
+                <a:extLst>
+                  <a:ext uri="{FF2B5EF4-FFF2-40B4-BE49-F238E27FC236}">
+                    <a16:creationId xmlns:a16="http://schemas.microsoft.com/office/drawing/2014/main" id="{F52E42A9-C849-A957-2BEE-C0F0BD7C0F5C}"/>
+                  </a:ext>
+                </a:extLst>
+              </p:cNvPr>
+              <p:cNvPicPr/>
+              <p:nvPr/>
+            </p:nvPicPr>
+            <p:blipFill>
+              <a:blip r:embed="rId6"/>
+              <a:stretch>
+                <a:fillRect/>
+              </a:stretch>
+            </p:blipFill>
+            <p:spPr>
+              <a:xfrm>
+                <a:off x="2197139" y="5537805"/>
+                <a:ext cx="787680" cy="311040"/>
+              </a:xfrm>
+              <a:prstGeom prst="rect">
+                <a:avLst/>
+              </a:prstGeom>
+            </p:spPr>
+          </p:pic>
+        </mc:Fallback>
+      </mc:AlternateContent>
+      <mc:AlternateContent xmlns:mc="http://schemas.openxmlformats.org/markup-compatibility/2006">
+        <mc:Choice xmlns:p14="http://schemas.microsoft.com/office/powerpoint/2010/main" Requires="p14">
+          <p:contentPart p14:bwMode="auto" r:id="rId7">
+            <p14:nvContentPartPr>
+              <p14:cNvPr id="9" name="インク 8">
+                <a:extLst>
+                  <a:ext uri="{FF2B5EF4-FFF2-40B4-BE49-F238E27FC236}">
+                    <a16:creationId xmlns:a16="http://schemas.microsoft.com/office/drawing/2014/main" id="{E7773AE9-5CC2-D9C8-70C2-6558EF881371}"/>
+                  </a:ext>
+                </a:extLst>
+              </p14:cNvPr>
+              <p14:cNvContentPartPr/>
+              <p14:nvPr/>
+            </p14:nvContentPartPr>
+            <p14:xfrm>
+              <a:off x="1481459" y="3734565"/>
+              <a:ext cx="153360" cy="22320"/>
+            </p14:xfrm>
+          </p:contentPart>
+        </mc:Choice>
+        <mc:Fallback>
+          <p:pic>
+            <p:nvPicPr>
+              <p:cNvPr id="9" name="インク 8">
+                <a:extLst>
+                  <a:ext uri="{FF2B5EF4-FFF2-40B4-BE49-F238E27FC236}">
+                    <a16:creationId xmlns:a16="http://schemas.microsoft.com/office/drawing/2014/main" id="{E7773AE9-5CC2-D9C8-70C2-6558EF881371}"/>
+                  </a:ext>
+                </a:extLst>
+              </p:cNvPr>
+              <p:cNvPicPr/>
+              <p:nvPr/>
+            </p:nvPicPr>
+            <p:blipFill>
+              <a:blip r:embed="rId8"/>
+              <a:stretch>
+                <a:fillRect/>
+              </a:stretch>
+            </p:blipFill>
+            <p:spPr>
+              <a:xfrm>
+                <a:off x="1409819" y="3590925"/>
+                <a:ext cx="297000" cy="309960"/>
+              </a:xfrm>
+              <a:prstGeom prst="rect">
+                <a:avLst/>
+              </a:prstGeom>
+            </p:spPr>
+          </p:pic>
+        </mc:Fallback>
+      </mc:AlternateContent>
+      <mc:AlternateContent xmlns:mc="http://schemas.openxmlformats.org/markup-compatibility/2006">
+        <mc:Choice xmlns:p14="http://schemas.microsoft.com/office/powerpoint/2010/main" Requires="p14">
+          <p:contentPart p14:bwMode="auto" r:id="rId9">
+            <p14:nvContentPartPr>
+              <p14:cNvPr id="10" name="インク 9">
+                <a:extLst>
+                  <a:ext uri="{FF2B5EF4-FFF2-40B4-BE49-F238E27FC236}">
+                    <a16:creationId xmlns:a16="http://schemas.microsoft.com/office/drawing/2014/main" id="{247668D3-691C-F3CA-3D15-7DD3EFAE4FF4}"/>
+                  </a:ext>
+                </a:extLst>
+              </p14:cNvPr>
+              <p14:cNvContentPartPr/>
+              <p14:nvPr/>
+            </p14:nvContentPartPr>
+            <p14:xfrm>
+              <a:off x="8689916" y="3355125"/>
+              <a:ext cx="1506600" cy="15840"/>
+            </p14:xfrm>
+          </p:contentPart>
+        </mc:Choice>
+        <mc:Fallback>
+          <p:pic>
+            <p:nvPicPr>
+              <p:cNvPr id="10" name="インク 9">
+                <a:extLst>
+                  <a:ext uri="{FF2B5EF4-FFF2-40B4-BE49-F238E27FC236}">
+                    <a16:creationId xmlns:a16="http://schemas.microsoft.com/office/drawing/2014/main" id="{247668D3-691C-F3CA-3D15-7DD3EFAE4FF4}"/>
+                  </a:ext>
+                </a:extLst>
+              </p:cNvPr>
+              <p:cNvPicPr/>
+              <p:nvPr/>
+            </p:nvPicPr>
+            <p:blipFill>
+              <a:blip r:embed="rId10"/>
+              <a:stretch>
+                <a:fillRect/>
+              </a:stretch>
+            </p:blipFill>
+            <p:spPr>
+              <a:xfrm>
+                <a:off x="8618276" y="3211125"/>
+                <a:ext cx="1650240" cy="303480"/>
+              </a:xfrm>
+              <a:prstGeom prst="rect">
+                <a:avLst/>
+              </a:prstGeom>
+            </p:spPr>
+          </p:pic>
+        </mc:Fallback>
+      </mc:AlternateContent>
+      <mc:AlternateContent xmlns:mc="http://schemas.openxmlformats.org/markup-compatibility/2006">
+        <mc:Choice xmlns:p14="http://schemas.microsoft.com/office/powerpoint/2010/main" Requires="p14">
+          <p:contentPart p14:bwMode="auto" r:id="rId11">
+            <p14:nvContentPartPr>
+              <p14:cNvPr id="11" name="インク 10">
+                <a:extLst>
+                  <a:ext uri="{FF2B5EF4-FFF2-40B4-BE49-F238E27FC236}">
+                    <a16:creationId xmlns:a16="http://schemas.microsoft.com/office/drawing/2014/main" id="{3AE809A5-BF3F-6EFD-2CA4-5EA2F80CB0B9}"/>
+                  </a:ext>
+                </a:extLst>
+              </p14:cNvPr>
+              <p14:cNvContentPartPr/>
+              <p14:nvPr/>
+            </p14:nvContentPartPr>
+            <p14:xfrm>
+              <a:off x="5408156" y="2462325"/>
+              <a:ext cx="784440" cy="12960"/>
+            </p14:xfrm>
+          </p:contentPart>
+        </mc:Choice>
+        <mc:Fallback>
+          <p:pic>
+            <p:nvPicPr>
+              <p:cNvPr id="11" name="インク 10">
+                <a:extLst>
+                  <a:ext uri="{FF2B5EF4-FFF2-40B4-BE49-F238E27FC236}">
+                    <a16:creationId xmlns:a16="http://schemas.microsoft.com/office/drawing/2014/main" id="{3AE809A5-BF3F-6EFD-2CA4-5EA2F80CB0B9}"/>
+                  </a:ext>
+                </a:extLst>
+              </p:cNvPr>
+              <p:cNvPicPr/>
+              <p:nvPr/>
+            </p:nvPicPr>
+            <p:blipFill>
+              <a:blip r:embed="rId12"/>
+              <a:stretch>
+                <a:fillRect/>
+              </a:stretch>
+            </p:blipFill>
+            <p:spPr>
+              <a:xfrm>
+                <a:off x="5354156" y="2354325"/>
+                <a:ext cx="892080" cy="228600"/>
+              </a:xfrm>
+              <a:prstGeom prst="rect">
+                <a:avLst/>
+              </a:prstGeom>
+            </p:spPr>
+          </p:pic>
+        </mc:Fallback>
+      </mc:AlternateContent>
+      <mc:AlternateContent xmlns:mc="http://schemas.openxmlformats.org/markup-compatibility/2006">
+        <mc:Choice xmlns:p14="http://schemas.microsoft.com/office/powerpoint/2010/main" Requires="p14">
+          <p:contentPart p14:bwMode="auto" r:id="rId13">
+            <p14:nvContentPartPr>
+              <p14:cNvPr id="12" name="インク 11">
+                <a:extLst>
+                  <a:ext uri="{FF2B5EF4-FFF2-40B4-BE49-F238E27FC236}">
+                    <a16:creationId xmlns:a16="http://schemas.microsoft.com/office/drawing/2014/main" id="{7A50E1DD-A389-7B79-4222-31E1C4920E68}"/>
+                  </a:ext>
+                </a:extLst>
+              </p14:cNvPr>
+              <p14:cNvContentPartPr/>
+              <p14:nvPr/>
+            </p14:nvContentPartPr>
+            <p14:xfrm>
+              <a:off x="3707156" y="2206725"/>
+              <a:ext cx="1893960" cy="1526040"/>
+            </p14:xfrm>
+          </p:contentPart>
+        </mc:Choice>
+        <mc:Fallback>
+          <p:pic>
+            <p:nvPicPr>
+              <p:cNvPr id="12" name="インク 11">
+                <a:extLst>
+                  <a:ext uri="{FF2B5EF4-FFF2-40B4-BE49-F238E27FC236}">
+                    <a16:creationId xmlns:a16="http://schemas.microsoft.com/office/drawing/2014/main" id="{7A50E1DD-A389-7B79-4222-31E1C4920E68}"/>
+                  </a:ext>
+                </a:extLst>
+              </p:cNvPr>
+              <p:cNvPicPr/>
+              <p:nvPr/>
+            </p:nvPicPr>
+            <p:blipFill>
+              <a:blip r:embed="rId14"/>
+              <a:stretch>
+                <a:fillRect/>
+              </a:stretch>
+            </p:blipFill>
+            <p:spPr>
+              <a:xfrm>
+                <a:off x="3653156" y="2098725"/>
+                <a:ext cx="2001600" cy="1741680"/>
+              </a:xfrm>
+              <a:prstGeom prst="rect">
+                <a:avLst/>
+              </a:prstGeom>
+            </p:spPr>
+          </p:pic>
+        </mc:Fallback>
+      </mc:AlternateContent>
+      <mc:AlternateContent xmlns:mc="http://schemas.openxmlformats.org/markup-compatibility/2006">
+        <mc:Choice xmlns:p14="http://schemas.microsoft.com/office/powerpoint/2010/main" Requires="p14">
+          <p:contentPart p14:bwMode="auto" r:id="rId15">
+            <p14:nvContentPartPr>
+              <p14:cNvPr id="13" name="インク 12">
+                <a:extLst>
+                  <a:ext uri="{FF2B5EF4-FFF2-40B4-BE49-F238E27FC236}">
+                    <a16:creationId xmlns:a16="http://schemas.microsoft.com/office/drawing/2014/main" id="{17D80D12-26D1-7305-EC3D-FC78637D0D38}"/>
+                  </a:ext>
+                </a:extLst>
+              </p14:cNvPr>
+              <p14:cNvContentPartPr/>
+              <p14:nvPr/>
+            </p14:nvContentPartPr>
+            <p14:xfrm>
+              <a:off x="1762436" y="1709565"/>
+              <a:ext cx="4047480" cy="3405240"/>
+            </p14:xfrm>
+          </p:contentPart>
+        </mc:Choice>
+        <mc:Fallback>
+          <p:pic>
+            <p:nvPicPr>
+              <p:cNvPr id="13" name="インク 12">
+                <a:extLst>
+                  <a:ext uri="{FF2B5EF4-FFF2-40B4-BE49-F238E27FC236}">
+                    <a16:creationId xmlns:a16="http://schemas.microsoft.com/office/drawing/2014/main" id="{17D80D12-26D1-7305-EC3D-FC78637D0D38}"/>
+                  </a:ext>
+                </a:extLst>
+              </p:cNvPr>
+              <p:cNvPicPr/>
+              <p:nvPr/>
+            </p:nvPicPr>
+            <p:blipFill>
+              <a:blip r:embed="rId16"/>
+              <a:stretch>
+                <a:fillRect/>
+              </a:stretch>
+            </p:blipFill>
+            <p:spPr>
+              <a:xfrm>
+                <a:off x="1726796" y="1637565"/>
+                <a:ext cx="4119120" cy="3548880"/>
+              </a:xfrm>
+              <a:prstGeom prst="rect">
+                <a:avLst/>
+              </a:prstGeom>
+            </p:spPr>
+          </p:pic>
+        </mc:Fallback>
+      </mc:AlternateContent>
+      <mc:AlternateContent xmlns:mc="http://schemas.openxmlformats.org/markup-compatibility/2006">
+        <mc:Choice xmlns:p14="http://schemas.microsoft.com/office/powerpoint/2010/main" Requires="p14">
+          <p:contentPart p14:bwMode="auto" r:id="rId17">
+            <p14:nvContentPartPr>
+              <p14:cNvPr id="14" name="インク 13">
+                <a:extLst>
+                  <a:ext uri="{FF2B5EF4-FFF2-40B4-BE49-F238E27FC236}">
+                    <a16:creationId xmlns:a16="http://schemas.microsoft.com/office/drawing/2014/main" id="{5E2902C3-5BA1-625C-2AD9-EF98496A6601}"/>
+                  </a:ext>
+                </a:extLst>
+              </p14:cNvPr>
+              <p14:cNvContentPartPr/>
+              <p14:nvPr/>
+            </p14:nvContentPartPr>
+            <p14:xfrm>
+              <a:off x="3559556" y="5606565"/>
+              <a:ext cx="568440" cy="95040"/>
+            </p14:xfrm>
+          </p:contentPart>
+        </mc:Choice>
+        <mc:Fallback>
+          <p:pic>
+            <p:nvPicPr>
+              <p:cNvPr id="14" name="インク 13">
+                <a:extLst>
+                  <a:ext uri="{FF2B5EF4-FFF2-40B4-BE49-F238E27FC236}">
+                    <a16:creationId xmlns:a16="http://schemas.microsoft.com/office/drawing/2014/main" id="{5E2902C3-5BA1-625C-2AD9-EF98496A6601}"/>
+                  </a:ext>
+                </a:extLst>
+              </p:cNvPr>
+              <p:cNvPicPr/>
+              <p:nvPr/>
+            </p:nvPicPr>
+            <p:blipFill>
+              <a:blip r:embed="rId18"/>
+              <a:stretch>
+                <a:fillRect/>
+              </a:stretch>
+            </p:blipFill>
+            <p:spPr>
+              <a:xfrm>
+                <a:off x="3523916" y="5534565"/>
+                <a:ext cx="640080" cy="238680"/>
+              </a:xfrm>
+              <a:prstGeom prst="rect">
+                <a:avLst/>
+              </a:prstGeom>
+            </p:spPr>
+          </p:pic>
+        </mc:Fallback>
+      </mc:AlternateContent>
+      <mc:AlternateContent xmlns:mc="http://schemas.openxmlformats.org/markup-compatibility/2006">
+        <mc:Choice xmlns:p14="http://schemas.microsoft.com/office/powerpoint/2010/main" Requires="p14">
+          <p:contentPart p14:bwMode="auto" r:id="rId19">
+            <p14:nvContentPartPr>
+              <p14:cNvPr id="15" name="インク 14">
+                <a:extLst>
+                  <a:ext uri="{FF2B5EF4-FFF2-40B4-BE49-F238E27FC236}">
+                    <a16:creationId xmlns:a16="http://schemas.microsoft.com/office/drawing/2014/main" id="{84F5C643-3DDD-8B8A-973E-F7CD1E299A2B}"/>
+                  </a:ext>
+                </a:extLst>
+              </p14:cNvPr>
+              <p14:cNvContentPartPr/>
+              <p14:nvPr/>
+            </p14:nvContentPartPr>
+            <p14:xfrm>
+              <a:off x="7899716" y="5224965"/>
+              <a:ext cx="349920" cy="54360"/>
+            </p14:xfrm>
+          </p:contentPart>
+        </mc:Choice>
+        <mc:Fallback>
+          <p:pic>
+            <p:nvPicPr>
+              <p:cNvPr id="15" name="インク 14">
+                <a:extLst>
+                  <a:ext uri="{FF2B5EF4-FFF2-40B4-BE49-F238E27FC236}">
+                    <a16:creationId xmlns:a16="http://schemas.microsoft.com/office/drawing/2014/main" id="{84F5C643-3DDD-8B8A-973E-F7CD1E299A2B}"/>
+                  </a:ext>
+                </a:extLst>
+              </p:cNvPr>
+              <p:cNvPicPr/>
+              <p:nvPr/>
+            </p:nvPicPr>
+            <p:blipFill>
+              <a:blip r:embed="rId20"/>
+              <a:stretch>
+                <a:fillRect/>
+              </a:stretch>
+            </p:blipFill>
+            <p:spPr>
+              <a:xfrm>
+                <a:off x="7863716" y="5152965"/>
+                <a:ext cx="421560" cy="198000"/>
+              </a:xfrm>
+              <a:prstGeom prst="rect">
+                <a:avLst/>
+              </a:prstGeom>
+            </p:spPr>
+          </p:pic>
+        </mc:Fallback>
+      </mc:AlternateContent>
+      <mc:AlternateContent xmlns:mc="http://schemas.openxmlformats.org/markup-compatibility/2006">
+        <mc:Choice xmlns:p14="http://schemas.microsoft.com/office/powerpoint/2010/main" Requires="p14">
+          <p:contentPart p14:bwMode="auto" r:id="rId21">
+            <p14:nvContentPartPr>
+              <p14:cNvPr id="16" name="インク 15">
+                <a:extLst>
+                  <a:ext uri="{FF2B5EF4-FFF2-40B4-BE49-F238E27FC236}">
+                    <a16:creationId xmlns:a16="http://schemas.microsoft.com/office/drawing/2014/main" id="{E4A254FB-6784-9074-AFDC-6012C8E309A8}"/>
+                  </a:ext>
+                </a:extLst>
+              </p14:cNvPr>
+              <p14:cNvContentPartPr/>
+              <p14:nvPr/>
+            </p14:nvContentPartPr>
+            <p14:xfrm>
+              <a:off x="3458396" y="4873605"/>
+              <a:ext cx="222480" cy="22320"/>
+            </p14:xfrm>
+          </p:contentPart>
+        </mc:Choice>
+        <mc:Fallback>
+          <p:pic>
+            <p:nvPicPr>
+              <p:cNvPr id="16" name="インク 15">
+                <a:extLst>
+                  <a:ext uri="{FF2B5EF4-FFF2-40B4-BE49-F238E27FC236}">
+                    <a16:creationId xmlns:a16="http://schemas.microsoft.com/office/drawing/2014/main" id="{E4A254FB-6784-9074-AFDC-6012C8E309A8}"/>
+                  </a:ext>
+                </a:extLst>
+              </p:cNvPr>
+              <p:cNvPicPr/>
+              <p:nvPr/>
+            </p:nvPicPr>
+            <p:blipFill>
+              <a:blip r:embed="rId22"/>
+              <a:stretch>
+                <a:fillRect/>
+              </a:stretch>
+            </p:blipFill>
+            <p:spPr>
+              <a:xfrm>
+                <a:off x="3422396" y="4801965"/>
+                <a:ext cx="294120" cy="165960"/>
+              </a:xfrm>
+              <a:prstGeom prst="rect">
+                <a:avLst/>
+              </a:prstGeom>
+            </p:spPr>
+          </p:pic>
+        </mc:Fallback>
+      </mc:AlternateContent>
+      <mc:AlternateContent xmlns:mc="http://schemas.openxmlformats.org/markup-compatibility/2006">
+        <mc:Choice xmlns:p14="http://schemas.microsoft.com/office/powerpoint/2010/main" Requires="p14">
+          <p:contentPart p14:bwMode="auto" r:id="rId23">
+            <p14:nvContentPartPr>
+              <p14:cNvPr id="17" name="インク 16">
+                <a:extLst>
+                  <a:ext uri="{FF2B5EF4-FFF2-40B4-BE49-F238E27FC236}">
+                    <a16:creationId xmlns:a16="http://schemas.microsoft.com/office/drawing/2014/main" id="{66A048B5-AD15-72E0-FA6B-1C5B5FE2E063}"/>
+                  </a:ext>
+                </a:extLst>
+              </p14:cNvPr>
+              <p14:cNvContentPartPr/>
+              <p14:nvPr/>
+            </p14:nvContentPartPr>
+            <p14:xfrm>
+              <a:off x="8919236" y="4984845"/>
+              <a:ext cx="1659600" cy="29160"/>
+            </p14:xfrm>
+          </p:contentPart>
+        </mc:Choice>
+        <mc:Fallback>
+          <p:pic>
+            <p:nvPicPr>
+              <p:cNvPr id="17" name="インク 16">
+                <a:extLst>
+                  <a:ext uri="{FF2B5EF4-FFF2-40B4-BE49-F238E27FC236}">
+                    <a16:creationId xmlns:a16="http://schemas.microsoft.com/office/drawing/2014/main" id="{66A048B5-AD15-72E0-FA6B-1C5B5FE2E063}"/>
+                  </a:ext>
+                </a:extLst>
+              </p:cNvPr>
+              <p:cNvPicPr/>
+              <p:nvPr/>
+            </p:nvPicPr>
+            <p:blipFill>
+              <a:blip r:embed="rId24"/>
+              <a:stretch>
+                <a:fillRect/>
+              </a:stretch>
+            </p:blipFill>
+            <p:spPr>
+              <a:xfrm>
+                <a:off x="8883596" y="4913205"/>
+                <a:ext cx="1731240" cy="172800"/>
+              </a:xfrm>
+              <a:prstGeom prst="rect">
+                <a:avLst/>
+              </a:prstGeom>
+            </p:spPr>
+          </p:pic>
+        </mc:Fallback>
+      </mc:AlternateContent>
     </p:spTree>
     <p:extLst>
       <p:ext uri="{BB962C8B-B14F-4D97-AF65-F5344CB8AC3E}">
@@ -13520,6 +16108,108 @@
           </a:p>
         </p:txBody>
       </p:sp>
+      <mc:AlternateContent xmlns:mc="http://schemas.openxmlformats.org/markup-compatibility/2006">
+        <mc:Choice xmlns:p14="http://schemas.microsoft.com/office/powerpoint/2010/main" Requires="p14">
+          <p:contentPart p14:bwMode="auto" r:id="rId3">
+            <p14:nvContentPartPr>
+              <p14:cNvPr id="3" name="インク 2">
+                <a:extLst>
+                  <a:ext uri="{FF2B5EF4-FFF2-40B4-BE49-F238E27FC236}">
+                    <a16:creationId xmlns:a16="http://schemas.microsoft.com/office/drawing/2014/main" id="{0D0FF93B-80B4-5E8C-A5F4-196444775D57}"/>
+                  </a:ext>
+                </a:extLst>
+              </p14:cNvPr>
+              <p14:cNvContentPartPr/>
+              <p14:nvPr/>
+            </p14:nvContentPartPr>
+            <p14:xfrm>
+              <a:off x="4307636" y="3382845"/>
+              <a:ext cx="1840680" cy="27000"/>
+            </p14:xfrm>
+          </p:contentPart>
+        </mc:Choice>
+        <mc:Fallback>
+          <p:pic>
+            <p:nvPicPr>
+              <p:cNvPr id="3" name="インク 2">
+                <a:extLst>
+                  <a:ext uri="{FF2B5EF4-FFF2-40B4-BE49-F238E27FC236}">
+                    <a16:creationId xmlns:a16="http://schemas.microsoft.com/office/drawing/2014/main" id="{0D0FF93B-80B4-5E8C-A5F4-196444775D57}"/>
+                  </a:ext>
+                </a:extLst>
+              </p:cNvPr>
+              <p:cNvPicPr/>
+              <p:nvPr/>
+            </p:nvPicPr>
+            <p:blipFill>
+              <a:blip r:embed="rId4"/>
+              <a:stretch>
+                <a:fillRect/>
+              </a:stretch>
+            </p:blipFill>
+            <p:spPr>
+              <a:xfrm>
+                <a:off x="4271996" y="3310845"/>
+                <a:ext cx="1912320" cy="170640"/>
+              </a:xfrm>
+              <a:prstGeom prst="rect">
+                <a:avLst/>
+              </a:prstGeom>
+            </p:spPr>
+          </p:pic>
+        </mc:Fallback>
+      </mc:AlternateContent>
+      <mc:AlternateContent xmlns:mc="http://schemas.openxmlformats.org/markup-compatibility/2006">
+        <mc:Choice xmlns:p14="http://schemas.microsoft.com/office/powerpoint/2010/main" Requires="p14">
+          <p:contentPart p14:bwMode="auto" r:id="rId5">
+            <p14:nvContentPartPr>
+              <p14:cNvPr id="6" name="インク 5">
+                <a:extLst>
+                  <a:ext uri="{FF2B5EF4-FFF2-40B4-BE49-F238E27FC236}">
+                    <a16:creationId xmlns:a16="http://schemas.microsoft.com/office/drawing/2014/main" id="{AF15246F-0520-4271-746D-A8FD8BF4DBF2}"/>
+                  </a:ext>
+                </a:extLst>
+              </p14:cNvPr>
+              <p14:cNvContentPartPr/>
+              <p14:nvPr/>
+            </p14:nvContentPartPr>
+            <p14:xfrm>
+              <a:off x="3770447" y="3473205"/>
+              <a:ext cx="369360" cy="47160"/>
+            </p14:xfrm>
+          </p:contentPart>
+        </mc:Choice>
+        <mc:Fallback>
+          <p:pic>
+            <p:nvPicPr>
+              <p:cNvPr id="6" name="インク 5">
+                <a:extLst>
+                  <a:ext uri="{FF2B5EF4-FFF2-40B4-BE49-F238E27FC236}">
+                    <a16:creationId xmlns:a16="http://schemas.microsoft.com/office/drawing/2014/main" id="{AF15246F-0520-4271-746D-A8FD8BF4DBF2}"/>
+                  </a:ext>
+                </a:extLst>
+              </p:cNvPr>
+              <p:cNvPicPr/>
+              <p:nvPr/>
+            </p:nvPicPr>
+            <p:blipFill>
+              <a:blip r:embed="rId6"/>
+              <a:stretch>
+                <a:fillRect/>
+              </a:stretch>
+            </p:blipFill>
+            <p:spPr>
+              <a:xfrm>
+                <a:off x="3734807" y="3401565"/>
+                <a:ext cx="441000" cy="190800"/>
+              </a:xfrm>
+              <a:prstGeom prst="rect">
+                <a:avLst/>
+              </a:prstGeom>
+            </p:spPr>
+          </p:pic>
+        </mc:Fallback>
+      </mc:AlternateContent>
     </p:spTree>
     <p:extLst>
       <p:ext uri="{BB962C8B-B14F-4D97-AF65-F5344CB8AC3E}">
@@ -13936,6 +16626,108 @@
           </a:p>
         </p:txBody>
       </p:sp>
+      <mc:AlternateContent xmlns:mc="http://schemas.openxmlformats.org/markup-compatibility/2006">
+        <mc:Choice xmlns:p14="http://schemas.microsoft.com/office/powerpoint/2010/main" Requires="p14">
+          <p:contentPart p14:bwMode="auto" r:id="rId3">
+            <p14:nvContentPartPr>
+              <p14:cNvPr id="3" name="インク 2">
+                <a:extLst>
+                  <a:ext uri="{FF2B5EF4-FFF2-40B4-BE49-F238E27FC236}">
+                    <a16:creationId xmlns:a16="http://schemas.microsoft.com/office/drawing/2014/main" id="{30048FCD-FA36-4AB3-7F8B-E27E556DC0B7}"/>
+                  </a:ext>
+                </a:extLst>
+              </p14:cNvPr>
+              <p14:cNvContentPartPr/>
+              <p14:nvPr/>
+            </p14:nvContentPartPr>
+            <p14:xfrm>
+              <a:off x="3623282" y="3478965"/>
+              <a:ext cx="72720" cy="57240"/>
+            </p14:xfrm>
+          </p:contentPart>
+        </mc:Choice>
+        <mc:Fallback>
+          <p:pic>
+            <p:nvPicPr>
+              <p:cNvPr id="3" name="インク 2">
+                <a:extLst>
+                  <a:ext uri="{FF2B5EF4-FFF2-40B4-BE49-F238E27FC236}">
+                    <a16:creationId xmlns:a16="http://schemas.microsoft.com/office/drawing/2014/main" id="{30048FCD-FA36-4AB3-7F8B-E27E556DC0B7}"/>
+                  </a:ext>
+                </a:extLst>
+              </p:cNvPr>
+              <p:cNvPicPr/>
+              <p:nvPr/>
+            </p:nvPicPr>
+            <p:blipFill>
+              <a:blip r:embed="rId4"/>
+              <a:stretch>
+                <a:fillRect/>
+              </a:stretch>
+            </p:blipFill>
+            <p:spPr>
+              <a:xfrm>
+                <a:off x="3587642" y="3406965"/>
+                <a:ext cx="144360" cy="200880"/>
+              </a:xfrm>
+              <a:prstGeom prst="rect">
+                <a:avLst/>
+              </a:prstGeom>
+            </p:spPr>
+          </p:pic>
+        </mc:Fallback>
+      </mc:AlternateContent>
+      <mc:AlternateContent xmlns:mc="http://schemas.openxmlformats.org/markup-compatibility/2006">
+        <mc:Choice xmlns:p14="http://schemas.microsoft.com/office/powerpoint/2010/main" Requires="p14">
+          <p:contentPart p14:bwMode="auto" r:id="rId5">
+            <p14:nvContentPartPr>
+              <p14:cNvPr id="6" name="インク 5">
+                <a:extLst>
+                  <a:ext uri="{FF2B5EF4-FFF2-40B4-BE49-F238E27FC236}">
+                    <a16:creationId xmlns:a16="http://schemas.microsoft.com/office/drawing/2014/main" id="{331B08A9-06E2-4A7E-CC9F-22F636FBEB0D}"/>
+                  </a:ext>
+                </a:extLst>
+              </p14:cNvPr>
+              <p14:cNvContentPartPr/>
+              <p14:nvPr/>
+            </p14:nvContentPartPr>
+            <p14:xfrm>
+              <a:off x="4133402" y="3513525"/>
+              <a:ext cx="127440" cy="36000"/>
+            </p14:xfrm>
+          </p:contentPart>
+        </mc:Choice>
+        <mc:Fallback>
+          <p:pic>
+            <p:nvPicPr>
+              <p:cNvPr id="6" name="インク 5">
+                <a:extLst>
+                  <a:ext uri="{FF2B5EF4-FFF2-40B4-BE49-F238E27FC236}">
+                    <a16:creationId xmlns:a16="http://schemas.microsoft.com/office/drawing/2014/main" id="{331B08A9-06E2-4A7E-CC9F-22F636FBEB0D}"/>
+                  </a:ext>
+                </a:extLst>
+              </p:cNvPr>
+              <p:cNvPicPr/>
+              <p:nvPr/>
+            </p:nvPicPr>
+            <p:blipFill>
+              <a:blip r:embed="rId6"/>
+              <a:stretch>
+                <a:fillRect/>
+              </a:stretch>
+            </p:blipFill>
+            <p:spPr>
+              <a:xfrm>
+                <a:off x="4097402" y="3441525"/>
+                <a:ext cx="199080" cy="179640"/>
+              </a:xfrm>
+              <a:prstGeom prst="rect">
+                <a:avLst/>
+              </a:prstGeom>
+            </p:spPr>
+          </p:pic>
+        </mc:Fallback>
+      </mc:AlternateContent>
     </p:spTree>
     <p:extLst>
       <p:ext uri="{BB962C8B-B14F-4D97-AF65-F5344CB8AC3E}">
@@ -14384,6 +17176,108 @@
           </a:p>
         </p:txBody>
       </p:sp>
+      <mc:AlternateContent xmlns:mc="http://schemas.openxmlformats.org/markup-compatibility/2006">
+        <mc:Choice xmlns:p14="http://schemas.microsoft.com/office/powerpoint/2010/main" Requires="p14">
+          <p:contentPart p14:bwMode="auto" r:id="rId2">
+            <p14:nvContentPartPr>
+              <p14:cNvPr id="5" name="インク 4">
+                <a:extLst>
+                  <a:ext uri="{FF2B5EF4-FFF2-40B4-BE49-F238E27FC236}">
+                    <a16:creationId xmlns:a16="http://schemas.microsoft.com/office/drawing/2014/main" id="{E574B0E9-6A95-97BE-6CE1-5C4FA5C443BF}"/>
+                  </a:ext>
+                </a:extLst>
+              </p14:cNvPr>
+              <p14:cNvContentPartPr/>
+              <p14:nvPr/>
+            </p14:nvContentPartPr>
+            <p14:xfrm>
+              <a:off x="1458365" y="2807925"/>
+              <a:ext cx="3772440" cy="111600"/>
+            </p14:xfrm>
+          </p:contentPart>
+        </mc:Choice>
+        <mc:Fallback>
+          <p:pic>
+            <p:nvPicPr>
+              <p:cNvPr id="5" name="インク 4">
+                <a:extLst>
+                  <a:ext uri="{FF2B5EF4-FFF2-40B4-BE49-F238E27FC236}">
+                    <a16:creationId xmlns:a16="http://schemas.microsoft.com/office/drawing/2014/main" id="{E574B0E9-6A95-97BE-6CE1-5C4FA5C443BF}"/>
+                  </a:ext>
+                </a:extLst>
+              </p:cNvPr>
+              <p:cNvPicPr/>
+              <p:nvPr/>
+            </p:nvPicPr>
+            <p:blipFill>
+              <a:blip r:embed="rId3"/>
+              <a:stretch>
+                <a:fillRect/>
+              </a:stretch>
+            </p:blipFill>
+            <p:spPr>
+              <a:xfrm>
+                <a:off x="1422725" y="2736285"/>
+                <a:ext cx="3844080" cy="255240"/>
+              </a:xfrm>
+              <a:prstGeom prst="rect">
+                <a:avLst/>
+              </a:prstGeom>
+            </p:spPr>
+          </p:pic>
+        </mc:Fallback>
+      </mc:AlternateContent>
+      <mc:AlternateContent xmlns:mc="http://schemas.openxmlformats.org/markup-compatibility/2006">
+        <mc:Choice xmlns:p14="http://schemas.microsoft.com/office/powerpoint/2010/main" Requires="p14">
+          <p:contentPart p14:bwMode="auto" r:id="rId4">
+            <p14:nvContentPartPr>
+              <p14:cNvPr id="6" name="インク 5">
+                <a:extLst>
+                  <a:ext uri="{FF2B5EF4-FFF2-40B4-BE49-F238E27FC236}">
+                    <a16:creationId xmlns:a16="http://schemas.microsoft.com/office/drawing/2014/main" id="{C8E82D5D-3C30-EDE9-180E-2047C35AD5B8}"/>
+                  </a:ext>
+                </a:extLst>
+              </p14:cNvPr>
+              <p14:cNvContentPartPr/>
+              <p14:nvPr/>
+            </p14:nvContentPartPr>
+            <p14:xfrm>
+              <a:off x="6354365" y="3707565"/>
+              <a:ext cx="3155040" cy="77760"/>
+            </p14:xfrm>
+          </p:contentPart>
+        </mc:Choice>
+        <mc:Fallback>
+          <p:pic>
+            <p:nvPicPr>
+              <p:cNvPr id="6" name="インク 5">
+                <a:extLst>
+                  <a:ext uri="{FF2B5EF4-FFF2-40B4-BE49-F238E27FC236}">
+                    <a16:creationId xmlns:a16="http://schemas.microsoft.com/office/drawing/2014/main" id="{C8E82D5D-3C30-EDE9-180E-2047C35AD5B8}"/>
+                  </a:ext>
+                </a:extLst>
+              </p:cNvPr>
+              <p:cNvPicPr/>
+              <p:nvPr/>
+            </p:nvPicPr>
+            <p:blipFill>
+              <a:blip r:embed="rId5"/>
+              <a:stretch>
+                <a:fillRect/>
+              </a:stretch>
+            </p:blipFill>
+            <p:spPr>
+              <a:xfrm>
+                <a:off x="6318365" y="3635565"/>
+                <a:ext cx="3226680" cy="221400"/>
+              </a:xfrm>
+              <a:prstGeom prst="rect">
+                <a:avLst/>
+              </a:prstGeom>
+            </p:spPr>
+          </p:pic>
+        </mc:Fallback>
+      </mc:AlternateContent>
     </p:spTree>
     <p:extLst>
       <p:ext uri="{BB962C8B-B14F-4D97-AF65-F5344CB8AC3E}">
@@ -20645,8 +23539,8 @@
           </a:p>
         </p:txBody>
       </p:sp>
-      <mc:AlternateContent xmlns:mc="http://schemas.openxmlformats.org/markup-compatibility/2006">
-        <mc:Choice xmlns:a14="http://schemas.microsoft.com/office/drawing/2010/main" Requires="a14">
+      <mc:AlternateContent xmlns:mc="http://schemas.openxmlformats.org/markup-compatibility/2006" xmlns:a14="http://schemas.microsoft.com/office/drawing/2010/main">
+        <mc:Choice Requires="a14">
           <p:sp>
             <p:nvSpPr>
               <p:cNvPr id="16" name="TextBox 15">
@@ -20790,7 +23684,7 @@
             </p:txBody>
           </p:sp>
         </mc:Choice>
-        <mc:Fallback>
+        <mc:Fallback xmlns="">
           <p:sp>
             <p:nvSpPr>
               <p:cNvPr id="16" name="TextBox 15">
